--- a/result/머신러닝_심층_기술_가이드_재현검증.pptx
+++ b/result/머신러닝_심층_기술_가이드_재현검증.pptx
@@ -27425,7 +27425,7 @@
                 <ns1:ea typeface="Pretendard SemiBold" panose="02000703000000020004" pitchFamily="2" charset="-127"/>
                 <ns1:cs typeface="Pretendard SemiBold" panose="02000703000000020004" pitchFamily="2" charset="-127"/>
               </ns1:rPr>
-              <ns1:t>ML 기술 기반⋯3</ns1:t>
+              <ns1:t>ML 기술 기반</ns1:t>
             </ns1:r>
             <ns1:endParaRPr lang="en-US" sz="3000" dirty="0" smtClean="0">
               <ns1:solidFill>
@@ -27459,7 +27459,7 @@
                 <ns1:ea typeface="Pretendard SemiBold" panose="02000703000000020004" pitchFamily="2" charset="-127"/>
                 <ns1:cs typeface="Pretendard SemiBold" panose="02000703000000020004" pitchFamily="2" charset="-127"/>
               </ns1:rPr>
-              <ns1:t>ML 파이프라인 &amp; 방법론⋯5</ns1:t>
+              <ns1:t>ML 파이프라인 &amp; 방법론</ns1:t>
             </ns1:r>
           </ns1:p>
           <ns1:p>
@@ -27481,7 +27481,7 @@
                 <ns1:ea typeface="Pretendard SemiBold" panose="02000703000000020004" pitchFamily="2" charset="-127"/>
                 <ns1:cs typeface="Pretendard SemiBold" panose="02000703000000020004" pitchFamily="2" charset="-127"/>
               </ns1:rPr>
-              <ns1:t>엔터프라이즈 도입⋯8</ns1:t>
+              <ns1:t>엔터프라이즈 도입</ns1:t>
             </ns1:r>
           </ns1:p>
           <ns1:p>
@@ -27503,7 +27503,7 @@
                 <ns1:ea typeface="Pretendard SemiBold" panose="02000703000000020004" pitchFamily="2" charset="-127"/>
                 <ns1:cs typeface="Pretendard SemiBold" panose="02000703000000020004" pitchFamily="2" charset="-127"/>
               </ns1:rPr>
-              <ns1:t/>
+              <ns1:t>GS Neotek ML 서비스</ns1:t>
             </ns1:r>
           </ns1:p>
           <ns1:p>
@@ -27692,7 +27692,7 @@
                 <ns1:ea typeface="Pretendard SemiBold" panose="02000703000000020004" pitchFamily="2" charset="-127"/>
                 <ns1:cs typeface="Pretendard SemiBold" panose="02000703000000020004" pitchFamily="2" charset="-127"/>
               </ns1:rPr>
-              <ns1:t/>
+              <ns1:t>4.</ns1:t>
             </ns1:r>
             <ns1:endParaRPr lang="en-US" altLang="ko-KR" sz="3000" dirty="0">
               <ns1:solidFill>
@@ -27805,8 +27805,8 @@
         </ns0:nvCxnSpPr>
         <ns0:spPr>
           <ns1:xfrm>
-            <ns1:off x="9160778" y="2005776"/>
-            <ns1:ext cx="3031222" cy="0"/>
+            <ns1:off x="9501278" y="2005776"/>
+            <ns1:ext cx="2690722" cy="0"/>
           </ns1:xfrm>
           <ns1:prstGeom prst="line">
             <ns1:avLst/>
@@ -27843,8 +27843,8 @@
         </ns0:nvCxnSpPr>
         <ns0:spPr>
           <ns1:xfrm>
-            <ns1:off x="9160778" y="2680450"/>
-            <ns1:ext cx="3031222" cy="0"/>
+            <ns1:off x="9501278" y="2680450"/>
+            <ns1:ext cx="2690722" cy="0"/>
           </ns1:xfrm>
           <ns1:prstGeom prst="line">
             <ns1:avLst/>
@@ -27881,8 +27881,8 @@
         </ns0:nvCxnSpPr>
         <ns0:spPr>
           <ns1:xfrm>
-            <ns1:off x="9160778" y="3355124"/>
-            <ns1:ext cx="3031222" cy="0"/>
+            <ns1:off x="9501278" y="3355124"/>
+            <ns1:ext cx="2690722" cy="0"/>
           </ns1:xfrm>
           <ns1:prstGeom prst="line">
             <ns1:avLst/>
@@ -27919,8 +27919,8 @@
         </ns0:nvCxnSpPr>
         <ns0:spPr>
           <ns1:xfrm>
-            <ns1:off x="9160778" y="4029798"/>
-            <ns1:ext cx="3031222" cy="0"/>
+            <ns1:off x="9501278" y="4029798"/>
+            <ns1:ext cx="2690722" cy="0"/>
           </ns1:xfrm>
           <ns1:prstGeom prst="line">
             <ns1:avLst/>
@@ -27929,7 +27929,7 @@
             <ns1:solidFill>
               <ns1:schemeClr val="bg2">
                 <ns1:lumMod val="90000"/>
-                <ns1:alpha val="0"/>
+                <ns1:alpha val="100000"/>
               </ns1:schemeClr>
             </ns1:solidFill>
           </ns1:ln>
@@ -27957,8 +27957,8 @@
         </ns0:nvCxnSpPr>
         <ns0:spPr>
           <ns1:xfrm>
-            <ns1:off x="9160778" y="4704472"/>
-            <ns1:ext cx="3031222" cy="0"/>
+            <ns1:off x="9501278" y="4704472"/>
+            <ns1:ext cx="2690722" cy="0"/>
           </ns1:xfrm>
           <ns1:prstGeom prst="line">
             <ns1:avLst/>
@@ -27995,8 +27995,8 @@
         </ns0:nvCxnSpPr>
         <ns0:spPr>
           <ns1:xfrm>
-            <ns1:off x="9160778" y="5379146"/>
-            <ns1:ext cx="3031222" cy="0"/>
+            <ns1:off x="9501278" y="5379146"/>
+            <ns1:ext cx="2690722" cy="0"/>
           </ns1:xfrm>
           <ns1:prstGeom prst="line">
             <ns1:avLst/>
@@ -28033,8 +28033,8 @@
         </ns0:nvCxnSpPr>
         <ns0:spPr>
           <ns1:xfrm>
-            <ns1:off x="9160778" y="6053819"/>
-            <ns1:ext cx="3031222" cy="0"/>
+            <ns1:off x="9501278" y="6053819"/>
+            <ns1:ext cx="2690722" cy="0"/>
           </ns1:xfrm>
           <ns1:prstGeom prst="line">
             <ns1:avLst/>
@@ -28178,7 +28178,7 @@
                 <ns1:ea typeface="Pretendard" panose="02000503000000020004" pitchFamily="2" charset="-127"/>
                 <ns1:cs typeface="Pretendard" panose="02000503000000020004" pitchFamily="2" charset="-127"/>
               </ns1:rPr>
-              <ns1:t>08</ns1:t>
+              <ns1:t>06</ns1:t>
             </ns1:r>
             <ns1:endParaRPr lang="en-US" altLang="ko-KR" sz="1400" dirty="0">
               <ns1:solidFill>
@@ -28208,7 +28208,7 @@
                 <ns1:ea typeface="Pretendard" panose="02000503000000020004" pitchFamily="2" charset="-127"/>
                 <ns1:cs typeface="Pretendard" panose="02000503000000020004" pitchFamily="2" charset="-127"/>
               </ns1:rPr>
-              <ns1:t/>
+              <ns1:t>10</ns1:t>
             </ns1:r>
             <ns1:endParaRPr lang="en-US" altLang="ko-KR" sz="1400" dirty="0">
               <ns1:solidFill>

--- a/result/머신러닝_심층_기술_가이드_재현검증.pptx
+++ b/result/머신러닝_심층_기술_가이드_재현검증.pptx
@@ -15291,7 +15291,7 @@
                 <ns1:latin typeface="맑은 고딕"/>
                 <ns1:ea typeface="맑은 고딕"/>
               </ns1:rPr>
-              <ns1:t>🖼 Multi-Head Attention 구조 다이어그램</ns1:t>
+              <ns1:t>[이미지: Multi-Head Attention 구조 다이어그램]</ns1:t>
             </ns1:r>
             <ns1:endParaRPr lang="ko-KR" altLang="en-US" sz="1200" dirty="0">
               <ns1:solidFill>
@@ -15354,7 +15354,7 @@
                 <ns1:latin typeface="맑은 고딕"/>
                 <ns1:ea typeface="맑은 고딕"/>
               </ns1:rPr>
-              <ns1:t>🖼 Foundation Model 사전학습→파인튜닝 흐름</ns1:t>
+              <ns1:t>[이미지: Foundation Model 사전학습→파인튜닝 흐름]</ns1:t>
             </ns1:r>
             <ns1:endParaRPr lang="ko-KR" altLang="en-US" sz="1200" dirty="0">
               <ns1:solidFill>
@@ -15417,7 +15417,7 @@
                 <ns1:latin typeface="맑은 고딕"/>
                 <ns1:ea typeface="맑은 고딕"/>
               </ns1:rPr>
-              <ns1:t>🖼 RLHF 보상모델 학습 프로세스</ns1:t>
+              <ns1:t>[이미지: RLHF 보상모델 학습 프로세스]</ns1:t>
             </ns1:r>
             <ns1:endParaRPr lang="ko-KR" altLang="en-US" sz="1200" dirty="0">
               <ns1:solidFill>
@@ -15472,12 +15472,18 @@
           <ns1:p>
             <ns1:pPr algn="ctr"/>
             <ns1:r>
-              <ns1:rPr lang="ko-KR" altLang="ko-KR" sz="1400" dirty="0" smtClean="0">
+              <ns1:rPr lang="ko-KR" altLang="ko-KR" sz="1400" dirty="0" smtClean="0" b="1">
                 <ns1:latin typeface="Pretendard Medium" panose="02000603000000020004" pitchFamily="2" charset="-127"/>
                 <ns1:ea typeface="Pretendard Medium" panose="02000603000000020004" pitchFamily="2" charset="-127"/>
                 <ns1:cs typeface="Pretendard Medium" panose="02000603000000020004" pitchFamily="2" charset="-127"/>
               </ns1:rPr>
-              <ns1:t>Transformer</ns1:t>
+              <ns1:t>01 Transformer</ns1:t>
+            </ns1:r>
+          </ns1:p>
+          <ns1:p>
+            <ns1:r>
+              <ns1:rPr lang="ko-KR" dirty="0"/>
+              <ns1:t>어텐션 메커니즘</ns1:t>
             </ns1:r>
           </ns1:p>
         </ns0:txBody>
@@ -15527,12 +15533,18 @@
           <ns1:p>
             <ns1:pPr algn="ctr"/>
             <ns1:r>
-              <ns1:rPr lang="ko-KR" altLang="ko-KR" sz="1400" dirty="0" smtClean="0">
+              <ns1:rPr lang="ko-KR" altLang="ko-KR" sz="1400" dirty="0" smtClean="0" b="1">
                 <ns1:latin typeface="Pretendard Medium" panose="02000603000000020004" pitchFamily="2" charset="-127"/>
                 <ns1:ea typeface="Pretendard Medium" panose="02000603000000020004" pitchFamily="2" charset="-127"/>
                 <ns1:cs typeface="Pretendard Medium" panose="02000603000000020004" pitchFamily="2" charset="-127"/>
               </ns1:rPr>
-              <ns1:t>Foundation Model</ns1:t>
+              <ns1:t>02 Foundation Model</ns1:t>
+            </ns1:r>
+          </ns1:p>
+          <ns1:p>
+            <ns1:r>
+              <ns1:rPr lang="ko-KR" dirty="0"/>
+              <ns1:t>대규모 사전학습</ns1:t>
             </ns1:r>
           </ns1:p>
         </ns0:txBody>
@@ -15582,12 +15594,18 @@
           <ns1:p>
             <ns1:pPr algn="ctr"/>
             <ns1:r>
-              <ns1:rPr lang="ko-KR" altLang="ko-KR" sz="1400" dirty="0" smtClean="0">
+              <ns1:rPr lang="ko-KR" altLang="ko-KR" sz="1400" dirty="0" smtClean="0" b="1">
                 <ns1:latin typeface="Pretendard Medium" panose="02000603000000020004" pitchFamily="2" charset="-127"/>
                 <ns1:ea typeface="Pretendard Medium" panose="02000603000000020004" pitchFamily="2" charset="-127"/>
                 <ns1:cs typeface="Pretendard Medium" panose="02000603000000020004" pitchFamily="2" charset="-127"/>
               </ns1:rPr>
-              <ns1:t>RLHF</ns1:t>
+              <ns1:t>03 RLHF</ns1:t>
+            </ns1:r>
+          </ns1:p>
+          <ns1:p>
+            <ns1:r>
+              <ns1:rPr lang="ko-KR" dirty="0"/>
+              <ns1:t>인간선호 강화학습</ns1:t>
             </ns1:r>
           </ns1:p>
         </ns0:txBody>
@@ -15610,7 +15628,7 @@
           <ns1:lstStyle/>
           <ns1:p>
             <ns1:r>
-              <ns1:rPr lang="en-US" altLang="ko-KR" dirty="0" smtClean="0"/>
+              <ns1:rPr lang="ko-KR" altLang="ko-KR" dirty="0" smtClean="0"/>
               <ns1:t>ML 기술 기반</ns1:t>
             </ns1:r>
             <ns1:endParaRPr lang="ko-KR" altLang="en-US" dirty="0"/>
@@ -15633,8 +15651,8 @@
           <ns1:lstStyle/>
           <ns1:p>
             <ns1:r>
-              <ns1:rPr lang="en-US" altLang="ko-KR" dirty="0"/>
-              <ns1:t/>
+              <ns1:rPr lang="ko-KR" altLang="ko-KR" dirty="0"/>
+              <ns1:t>01 ML 패러다임</ns1:t>
             </ns1:r>
           </ns1:p>
         </ns0:txBody>
@@ -15661,7 +15679,7 @@
           <ns1:lstStyle/>
           <ns1:p>
             <ns1:r>
-              <ns1:rPr lang="en-US" altLang="ko-KR" dirty="0" smtClean="0">
+              <ns1:rPr lang="ko-KR" altLang="ko-KR" dirty="0" smtClean="0">
                 <ns1:solidFill>
                   <ns1:schemeClr val="tx1">
                     <ns1:lumMod val="85000"/>
@@ -15672,7 +15690,7 @@
                 <ns1:ea typeface="Pretendard SemiBold" panose="02000703000000020004" pitchFamily="2" charset="-127"/>
                 <ns1:cs typeface="Pretendard SemiBold" panose="02000703000000020004" pitchFamily="2" charset="-127"/>
               </ns1:rPr>
-              <ns1:t>ML 기술 기반</ns1:t>
+              <ns1:t>1.1. 3대 핵심 기술 트렌드</ns1:t>
             </ns1:r>
           </ns1:p>
           <ns1:p>
@@ -15737,21 +15755,7 @@
                 <ns1:ea typeface="Pretendard" panose="02000503000000020004" pitchFamily="2" charset="-127"/>
                 <ns1:cs typeface="Pretendard" panose="02000503000000020004" pitchFamily="2" charset="-127"/>
               </ns1:rPr>
-              <ns1:t/>
-            </ns1:r>
-            <ns1:r>
-              <ns1:rPr lang="en-US" altLang="ko-KR" sz="1200" dirty="0" smtClean="0">
-                <ns1:solidFill>
-                  <ns1:schemeClr val="tx1">
-                    <ns1:lumMod val="75000"/>
-                    <ns1:lumOff val="25000"/>
-                  </ns1:schemeClr>
-                </ns1:solidFill>
-                <ns1:latin typeface="Pretendard" panose="02000503000000020004" pitchFamily="2" charset="-127"/>
-                <ns1:ea typeface="Pretendard" panose="02000503000000020004" pitchFamily="2" charset="-127"/>
-                <ns1:cs typeface="Pretendard" panose="02000503000000020004" pitchFamily="2" charset="-127"/>
-              </ns1:rPr>
-              <ns1:t/>
+              <ns1:t>Transformer·Foundation Model·RLHF 기반 ML 패러다임 전환</ns1:t>
             </ns1:r>
           </ns1:p>
           <ns1:p>
@@ -16142,7 +16146,7 @@
                 <ns1:ea typeface="Pretendard" panose="02000503000000020004" pitchFamily="2" charset="-127"/>
                 <ns1:cs typeface="Pretendard" panose="02000503000000020004" pitchFamily="2" charset="-127"/>
               </ns1:rPr>
-              <ns1:t>어텐션 메커니즘. 병렬처리 가능. Multi-Head Attention 기반</ns1:t>
+              <ns1:t>BERT·GPT의 핵심. 병렬 처리·장거리 의존성 모델링. RNN 한계 극복</ns1:t>
             </ns1:r>
           </ns1:p>
           <ns1:p>
@@ -16152,102 +16156,18 @@
               </ns1:lnSpc>
             </ns1:pPr>
             <ns1:r>
-              <ns1:rPr lang="en-US" altLang="ko-KR" sz="1200" dirty="0" smtClean="0">
-                <ns1:solidFill>
-                  <ns1:schemeClr val="tx1">
-                    <ns1:lumMod val="75000"/>
-                    <ns1:lumOff val="25000"/>
-                  </ns1:schemeClr>
-                </ns1:solidFill>
-                <ns1:latin typeface="Pretendard" panose="02000503000000020004" pitchFamily="2" charset="-127"/>
-                <ns1:ea typeface="Pretendard" panose="02000503000000020004" pitchFamily="2" charset="-127"/>
-                <ns1:cs typeface="Pretendard" panose="02000503000000020004" pitchFamily="2" charset="-127"/>
-              </ns1:rPr>
-              <ns1:t/>
-            </ns1:r>
-            <ns1:r>
-              <ns1:rPr lang="en-US" altLang="ko-KR" sz="1200" dirty="0">
-                <ns1:solidFill>
-                  <ns1:schemeClr val="tx1">
-                    <ns1:lumMod val="75000"/>
-                    <ns1:lumOff val="25000"/>
-                  </ns1:schemeClr>
-                </ns1:solidFill>
-                <ns1:latin typeface="Pretendard" panose="02000503000000020004" pitchFamily="2" charset="-127"/>
-                <ns1:ea typeface="Pretendard" panose="02000503000000020004" pitchFamily="2" charset="-127"/>
-                <ns1:cs typeface="Pretendard" panose="02000503000000020004" pitchFamily="2" charset="-127"/>
-              </ns1:rPr>
-              <ns1:t/>
-            </ns1:r>
-            <ns1:r>
-              <ns1:rPr lang="en-US" altLang="ko-KR" sz="1200" dirty="0" err="1">
-                <ns1:solidFill>
-                  <ns1:schemeClr val="tx1">
-                    <ns1:lumMod val="75000"/>
-                    <ns1:lumOff val="25000"/>
-                  </ns1:schemeClr>
-                </ns1:solidFill>
-                <ns1:latin typeface="Pretendard" panose="02000503000000020004" pitchFamily="2" charset="-127"/>
-                <ns1:ea typeface="Pretendard" panose="02000503000000020004" pitchFamily="2" charset="-127"/>
-                <ns1:cs typeface="Pretendard" panose="02000503000000020004" pitchFamily="2" charset="-127"/>
-              </ns1:rPr>
-              <ns1:t/>
-            </ns1:r>
-            <ns1:r>
-              <ns1:rPr lang="en-US" altLang="ko-KR" sz="1200" dirty="0">
-                <ns1:solidFill>
-                  <ns1:schemeClr val="tx1">
-                    <ns1:lumMod val="75000"/>
-                    <ns1:lumOff val="25000"/>
-                  </ns1:schemeClr>
-                </ns1:solidFill>
-                <ns1:latin typeface="Pretendard" panose="02000503000000020004" pitchFamily="2" charset="-127"/>
-                <ns1:ea typeface="Pretendard" panose="02000503000000020004" pitchFamily="2" charset="-127"/>
-                <ns1:cs typeface="Pretendard" panose="02000503000000020004" pitchFamily="2" charset="-127"/>
-              </ns1:rPr>
-              <ns1:t/>
-            </ns1:r>
-            <ns1:r>
-              <ns1:rPr lang="en-US" altLang="ko-KR" sz="1200" dirty="0" err="1" smtClean="0">
-                <ns1:solidFill>
-                  <ns1:schemeClr val="tx1">
-                    <ns1:lumMod val="75000"/>
-                    <ns1:lumOff val="25000"/>
-                  </ns1:schemeClr>
-                </ns1:solidFill>
-                <ns1:latin typeface="Pretendard" panose="02000503000000020004" pitchFamily="2" charset="-127"/>
-                <ns1:ea typeface="Pretendard" panose="02000503000000020004" pitchFamily="2" charset="-127"/>
-                <ns1:cs typeface="Pretendard" panose="02000503000000020004" pitchFamily="2" charset="-127"/>
-              </ns1:rPr>
-              <ns1:t/>
-            </ns1:r>
-            <ns1:r>
-              <ns1:rPr lang="en-US" altLang="ko-KR" sz="1200" dirty="0" smtClean="0">
-                <ns1:solidFill>
-                  <ns1:schemeClr val="tx1">
-                    <ns1:lumMod val="75000"/>
-                    <ns1:lumOff val="25000"/>
-                  </ns1:schemeClr>
-                </ns1:solidFill>
-                <ns1:latin typeface="Pretendard" panose="02000503000000020004" pitchFamily="2" charset="-127"/>
-                <ns1:ea typeface="Pretendard" panose="02000503000000020004" pitchFamily="2" charset="-127"/>
-                <ns1:cs typeface="Pretendard" panose="02000503000000020004" pitchFamily="2" charset="-127"/>
-              </ns1:rPr>
-              <ns1:t/>
-            </ns1:r>
-            <ns1:r>
-              <ns1:rPr lang="en-US" altLang="ko-KR" sz="1200" dirty="0" err="1" smtClean="0">
-                <ns1:solidFill>
-                  <ns1:schemeClr val="tx1">
-                    <ns1:lumMod val="75000"/>
-                    <ns1:lumOff val="25000"/>
-                  </ns1:schemeClr>
-                </ns1:solidFill>
-                <ns1:latin typeface="Pretendard" panose="02000503000000020004" pitchFamily="2" charset="-127"/>
-                <ns1:ea typeface="Pretendard" panose="02000503000000020004" pitchFamily="2" charset="-127"/>
-                <ns1:cs typeface="Pretendard" panose="02000503000000020004" pitchFamily="2" charset="-127"/>
-              </ns1:rPr>
-              <ns1:t/>
+              <ns1:rPr lang="ko-KR" altLang="ko-KR" sz="1200" dirty="0" smtClean="0">
+                <ns1:solidFill>
+                  <ns1:schemeClr val="tx1">
+                    <ns1:lumMod val="75000"/>
+                    <ns1:lumOff val="25000"/>
+                  </ns1:schemeClr>
+                </ns1:solidFill>
+                <ns1:latin typeface="Pretendard" panose="02000503000000020004" pitchFamily="2" charset="-127"/>
+                <ns1:ea typeface="Pretendard" panose="02000503000000020004" pitchFamily="2" charset="-127"/>
+                <ns1:cs typeface="Pretendard" panose="02000503000000020004" pitchFamily="2" charset="-127"/>
+              </ns1:rPr>
+              <ns1:t>병렬 처리·장거리 의존성 모델링. RNN 한계 극복.</ns1:t>
             </ns1:r>
             <ns1:endParaRPr lang="en-US" altLang="ko-KR" sz="1200" dirty="0">
               <ns1:solidFill>
@@ -16719,7 +16639,7 @@
                 <ns1:ea typeface="Pretendard" panose="02000503000000020004" pitchFamily="2" charset="-127"/>
                 <ns1:cs typeface="Pretendard" panose="02000503000000020004" pitchFamily="2" charset="-127"/>
               </ns1:rPr>
-              <ns1:t>인간선호 강화학습. Reward Model 기반 정렬. InstructGPT 핵심</ns1:t>
+              <ns1:t>PPO·DPO 기반 인간선호 정렬. ChatGPT·Claude 핵심 학습 기법</ns1:t>
             </ns1:r>
           </ns1:p>
           <ns1:p>
@@ -16729,102 +16649,18 @@
               </ns1:lnSpc>
             </ns1:pPr>
             <ns1:r>
-              <ns1:rPr lang="en-US" altLang="ko-KR" sz="1200" dirty="0" smtClean="0">
-                <ns1:solidFill>
-                  <ns1:schemeClr val="tx1">
-                    <ns1:lumMod val="75000"/>
-                    <ns1:lumOff val="25000"/>
-                  </ns1:schemeClr>
-                </ns1:solidFill>
-                <ns1:latin typeface="Pretendard" panose="02000503000000020004" pitchFamily="2" charset="-127"/>
-                <ns1:ea typeface="Pretendard" panose="02000503000000020004" pitchFamily="2" charset="-127"/>
-                <ns1:cs typeface="Pretendard" panose="02000503000000020004" pitchFamily="2" charset="-127"/>
-              </ns1:rPr>
-              <ns1:t/>
-            </ns1:r>
-            <ns1:r>
-              <ns1:rPr lang="en-US" altLang="ko-KR" sz="1200" dirty="0">
-                <ns1:solidFill>
-                  <ns1:schemeClr val="tx1">
-                    <ns1:lumMod val="75000"/>
-                    <ns1:lumOff val="25000"/>
-                  </ns1:schemeClr>
-                </ns1:solidFill>
-                <ns1:latin typeface="Pretendard" panose="02000503000000020004" pitchFamily="2" charset="-127"/>
-                <ns1:ea typeface="Pretendard" panose="02000503000000020004" pitchFamily="2" charset="-127"/>
-                <ns1:cs typeface="Pretendard" panose="02000503000000020004" pitchFamily="2" charset="-127"/>
-              </ns1:rPr>
-              <ns1:t/>
-            </ns1:r>
-            <ns1:r>
-              <ns1:rPr lang="en-US" altLang="ko-KR" sz="1200" dirty="0" err="1">
-                <ns1:solidFill>
-                  <ns1:schemeClr val="tx1">
-                    <ns1:lumMod val="75000"/>
-                    <ns1:lumOff val="25000"/>
-                  </ns1:schemeClr>
-                </ns1:solidFill>
-                <ns1:latin typeface="Pretendard" panose="02000503000000020004" pitchFamily="2" charset="-127"/>
-                <ns1:ea typeface="Pretendard" panose="02000503000000020004" pitchFamily="2" charset="-127"/>
-                <ns1:cs typeface="Pretendard" panose="02000503000000020004" pitchFamily="2" charset="-127"/>
-              </ns1:rPr>
-              <ns1:t/>
-            </ns1:r>
-            <ns1:r>
-              <ns1:rPr lang="en-US" altLang="ko-KR" sz="1200" dirty="0">
-                <ns1:solidFill>
-                  <ns1:schemeClr val="tx1">
-                    <ns1:lumMod val="75000"/>
-                    <ns1:lumOff val="25000"/>
-                  </ns1:schemeClr>
-                </ns1:solidFill>
-                <ns1:latin typeface="Pretendard" panose="02000503000000020004" pitchFamily="2" charset="-127"/>
-                <ns1:ea typeface="Pretendard" panose="02000503000000020004" pitchFamily="2" charset="-127"/>
-                <ns1:cs typeface="Pretendard" panose="02000503000000020004" pitchFamily="2" charset="-127"/>
-              </ns1:rPr>
-              <ns1:t/>
-            </ns1:r>
-            <ns1:r>
-              <ns1:rPr lang="en-US" altLang="ko-KR" sz="1200" dirty="0" err="1" smtClean="0">
-                <ns1:solidFill>
-                  <ns1:schemeClr val="tx1">
-                    <ns1:lumMod val="75000"/>
-                    <ns1:lumOff val="25000"/>
-                  </ns1:schemeClr>
-                </ns1:solidFill>
-                <ns1:latin typeface="Pretendard" panose="02000503000000020004" pitchFamily="2" charset="-127"/>
-                <ns1:ea typeface="Pretendard" panose="02000503000000020004" pitchFamily="2" charset="-127"/>
-                <ns1:cs typeface="Pretendard" panose="02000503000000020004" pitchFamily="2" charset="-127"/>
-              </ns1:rPr>
-              <ns1:t/>
-            </ns1:r>
-            <ns1:r>
-              <ns1:rPr lang="en-US" altLang="ko-KR" sz="1200" dirty="0" smtClean="0">
-                <ns1:solidFill>
-                  <ns1:schemeClr val="tx1">
-                    <ns1:lumMod val="75000"/>
-                    <ns1:lumOff val="25000"/>
-                  </ns1:schemeClr>
-                </ns1:solidFill>
-                <ns1:latin typeface="Pretendard" panose="02000503000000020004" pitchFamily="2" charset="-127"/>
-                <ns1:ea typeface="Pretendard" panose="02000503000000020004" pitchFamily="2" charset="-127"/>
-                <ns1:cs typeface="Pretendard" panose="02000503000000020004" pitchFamily="2" charset="-127"/>
-              </ns1:rPr>
-              <ns1:t/>
-            </ns1:r>
-            <ns1:r>
-              <ns1:rPr lang="en-US" altLang="ko-KR" sz="1200" dirty="0" err="1" smtClean="0">
-                <ns1:solidFill>
-                  <ns1:schemeClr val="tx1">
-                    <ns1:lumMod val="75000"/>
-                    <ns1:lumOff val="25000"/>
-                  </ns1:schemeClr>
-                </ns1:solidFill>
-                <ns1:latin typeface="Pretendard" panose="02000503000000020004" pitchFamily="2" charset="-127"/>
-                <ns1:ea typeface="Pretendard" panose="02000503000000020004" pitchFamily="2" charset="-127"/>
-                <ns1:cs typeface="Pretendard" panose="02000503000000020004" pitchFamily="2" charset="-127"/>
-              </ns1:rPr>
-              <ns1:t/>
+              <ns1:rPr lang="ko-KR" altLang="ko-KR" sz="1200" dirty="0" smtClean="0">
+                <ns1:solidFill>
+                  <ns1:schemeClr val="tx1">
+                    <ns1:lumMod val="75000"/>
+                    <ns1:lumOff val="25000"/>
+                  </ns1:schemeClr>
+                </ns1:solidFill>
+                <ns1:latin typeface="Pretendard" panose="02000503000000020004" pitchFamily="2" charset="-127"/>
+                <ns1:ea typeface="Pretendard" panose="02000503000000020004" pitchFamily="2" charset="-127"/>
+                <ns1:cs typeface="Pretendard" panose="02000503000000020004" pitchFamily="2" charset="-127"/>
+              </ns1:rPr>
+              <ns1:t>ChatGPT·Claude 핵심 학습 기법.</ns1:t>
             </ns1:r>
             <ns1:endParaRPr lang="en-US" altLang="ko-KR" sz="1200" dirty="0">
               <ns1:solidFill>
@@ -17306,102 +17142,18 @@
               </ns1:lnSpc>
             </ns1:pPr>
             <ns1:r>
-              <ns1:rPr lang="en-US" altLang="ko-KR" sz="1200" dirty="0" smtClean="0">
-                <ns1:solidFill>
-                  <ns1:schemeClr val="tx1">
-                    <ns1:lumMod val="75000"/>
-                    <ns1:lumOff val="25000"/>
-                  </ns1:schemeClr>
-                </ns1:solidFill>
-                <ns1:latin typeface="Pretendard" panose="02000503000000020004" pitchFamily="2" charset="-127"/>
-                <ns1:ea typeface="Pretendard" panose="02000503000000020004" pitchFamily="2" charset="-127"/>
-                <ns1:cs typeface="Pretendard" panose="02000503000000020004" pitchFamily="2" charset="-127"/>
-              </ns1:rPr>
-              <ns1:t/>
-            </ns1:r>
-            <ns1:r>
-              <ns1:rPr lang="en-US" altLang="ko-KR" sz="1200" dirty="0">
-                <ns1:solidFill>
-                  <ns1:schemeClr val="tx1">
-                    <ns1:lumMod val="75000"/>
-                    <ns1:lumOff val="25000"/>
-                  </ns1:schemeClr>
-                </ns1:solidFill>
-                <ns1:latin typeface="Pretendard" panose="02000503000000020004" pitchFamily="2" charset="-127"/>
-                <ns1:ea typeface="Pretendard" panose="02000503000000020004" pitchFamily="2" charset="-127"/>
-                <ns1:cs typeface="Pretendard" panose="02000503000000020004" pitchFamily="2" charset="-127"/>
-              </ns1:rPr>
-              <ns1:t/>
-            </ns1:r>
-            <ns1:r>
-              <ns1:rPr lang="en-US" altLang="ko-KR" sz="1200" dirty="0" err="1">
-                <ns1:solidFill>
-                  <ns1:schemeClr val="tx1">
-                    <ns1:lumMod val="75000"/>
-                    <ns1:lumOff val="25000"/>
-                  </ns1:schemeClr>
-                </ns1:solidFill>
-                <ns1:latin typeface="Pretendard" panose="02000503000000020004" pitchFamily="2" charset="-127"/>
-                <ns1:ea typeface="Pretendard" panose="02000503000000020004" pitchFamily="2" charset="-127"/>
-                <ns1:cs typeface="Pretendard" panose="02000503000000020004" pitchFamily="2" charset="-127"/>
-              </ns1:rPr>
-              <ns1:t/>
-            </ns1:r>
-            <ns1:r>
-              <ns1:rPr lang="en-US" altLang="ko-KR" sz="1200" dirty="0">
-                <ns1:solidFill>
-                  <ns1:schemeClr val="tx1">
-                    <ns1:lumMod val="75000"/>
-                    <ns1:lumOff val="25000"/>
-                  </ns1:schemeClr>
-                </ns1:solidFill>
-                <ns1:latin typeface="Pretendard" panose="02000503000000020004" pitchFamily="2" charset="-127"/>
-                <ns1:ea typeface="Pretendard" panose="02000503000000020004" pitchFamily="2" charset="-127"/>
-                <ns1:cs typeface="Pretendard" panose="02000503000000020004" pitchFamily="2" charset="-127"/>
-              </ns1:rPr>
-              <ns1:t/>
-            </ns1:r>
-            <ns1:r>
-              <ns1:rPr lang="en-US" altLang="ko-KR" sz="1200" dirty="0" err="1" smtClean="0">
-                <ns1:solidFill>
-                  <ns1:schemeClr val="tx1">
-                    <ns1:lumMod val="75000"/>
-                    <ns1:lumOff val="25000"/>
-                  </ns1:schemeClr>
-                </ns1:solidFill>
-                <ns1:latin typeface="Pretendard" panose="02000503000000020004" pitchFamily="2" charset="-127"/>
-                <ns1:ea typeface="Pretendard" panose="02000503000000020004" pitchFamily="2" charset="-127"/>
-                <ns1:cs typeface="Pretendard" panose="02000503000000020004" pitchFamily="2" charset="-127"/>
-              </ns1:rPr>
-              <ns1:t/>
-            </ns1:r>
-            <ns1:r>
-              <ns1:rPr lang="en-US" altLang="ko-KR" sz="1200" dirty="0" smtClean="0">
-                <ns1:solidFill>
-                  <ns1:schemeClr val="tx1">
-                    <ns1:lumMod val="75000"/>
-                    <ns1:lumOff val="25000"/>
-                  </ns1:schemeClr>
-                </ns1:solidFill>
-                <ns1:latin typeface="Pretendard" panose="02000503000000020004" pitchFamily="2" charset="-127"/>
-                <ns1:ea typeface="Pretendard" panose="02000503000000020004" pitchFamily="2" charset="-127"/>
-                <ns1:cs typeface="Pretendard" panose="02000503000000020004" pitchFamily="2" charset="-127"/>
-              </ns1:rPr>
-              <ns1:t/>
-            </ns1:r>
-            <ns1:r>
-              <ns1:rPr lang="en-US" altLang="ko-KR" sz="1200" dirty="0" err="1" smtClean="0">
-                <ns1:solidFill>
-                  <ns1:schemeClr val="tx1">
-                    <ns1:lumMod val="75000"/>
-                    <ns1:lumOff val="25000"/>
-                  </ns1:schemeClr>
-                </ns1:solidFill>
-                <ns1:latin typeface="Pretendard" panose="02000503000000020004" pitchFamily="2" charset="-127"/>
-                <ns1:ea typeface="Pretendard" panose="02000503000000020004" pitchFamily="2" charset="-127"/>
-                <ns1:cs typeface="Pretendard" panose="02000503000000020004" pitchFamily="2" charset="-127"/>
-              </ns1:rPr>
-              <ns1:t/>
+              <ns1:rPr lang="ko-KR" altLang="ko-KR" sz="1200" dirty="0" smtClean="0">
+                <ns1:solidFill>
+                  <ns1:schemeClr val="tx1">
+                    <ns1:lumMod val="75000"/>
+                    <ns1:lumOff val="25000"/>
+                  </ns1:schemeClr>
+                </ns1:solidFill>
+                <ns1:latin typeface="Pretendard" panose="02000503000000020004" pitchFamily="2" charset="-127"/>
+                <ns1:ea typeface="Pretendard" panose="02000503000000020004" pitchFamily="2" charset="-127"/>
+                <ns1:cs typeface="Pretendard" panose="02000503000000020004" pitchFamily="2" charset="-127"/>
+              </ns1:rPr>
+              <ns1:t>ImageNet→LLM 패러다임 전환 선도.</ns1:t>
             </ns1:r>
             <ns1:endParaRPr lang="en-US" altLang="ko-KR" sz="1200" dirty="0">
               <ns1:solidFill>
@@ -17870,7 +17622,7 @@
                 <ns1:ea typeface="Pretendard SemiBold" panose="02000703000000020004" pitchFamily="2" charset="-127"/>
                 <ns1:cs typeface="Pretendard SemiBold" panose="02000703000000020004" pitchFamily="2" charset="-127"/>
               </ns1:rPr>
-              <ns1:t>| Transformer·Foundation Model·RLHF</ns1:t>
+              <ns1:t>| 1.1.1 Transformer·Foundation Model·RLHF — ML 패러다임을 이끄는 3대 핵심 기술</ns1:t>
             </ns1:r>
             <ns1:endParaRPr lang="en-US" sz="1600" dirty="0">
               <ns1:solidFill>

--- a/result/머신러닝_심층_기술_가이드_재현검증.pptx
+++ b/result/머신러닝_심층_기술_가이드_재현검증.pptx
@@ -15694,20 +15694,6 @@
             </ns1:r>
           </ns1:p>
           <ns1:p>
-            <ns1:r>
-              <ns1:rPr lang="ko-KR" altLang="en-US" dirty="0" smtClean="0">
-                <ns1:solidFill>
-                  <ns1:schemeClr val="tx1">
-                    <ns1:lumMod val="85000"/>
-                    <ns1:lumOff val="15000"/>
-                  </ns1:schemeClr>
-                </ns1:solidFill>
-                <ns1:latin typeface="Pretendard SemiBold" panose="02000703000000020004" pitchFamily="2" charset="-127"/>
-                <ns1:ea typeface="Pretendard SemiBold" panose="02000703000000020004" pitchFamily="2" charset="-127"/>
-                <ns1:cs typeface="Pretendard SemiBold" panose="02000703000000020004" pitchFamily="2" charset="-127"/>
-              </ns1:rPr>
-              <ns1:t/>
-            </ns1:r>
             <ns1:endParaRPr lang="en-US" altLang="ko-KR" dirty="0">
               <ns1:solidFill>
                 <ns1:schemeClr val="tx1">
@@ -15759,216 +15745,6 @@
             </ns1:r>
           </ns1:p>
           <ns1:p>
-            <ns1:r>
-              <ns1:rPr lang="en-US" altLang="ko-KR" sz="1200" dirty="0" smtClean="0">
-                <ns1:solidFill>
-                  <ns1:schemeClr val="tx1">
-                    <ns1:lumMod val="75000"/>
-                    <ns1:lumOff val="25000"/>
-                  </ns1:schemeClr>
-                </ns1:solidFill>
-                <ns1:latin typeface="Pretendard" panose="02000503000000020004" pitchFamily="2" charset="-127"/>
-                <ns1:ea typeface="Pretendard" panose="02000503000000020004" pitchFamily="2" charset="-127"/>
-                <ns1:cs typeface="Pretendard" panose="02000503000000020004" pitchFamily="2" charset="-127"/>
-              </ns1:rPr>
-              <ns1:t/>
-            </ns1:r>
-            <ns1:r>
-              <ns1:rPr lang="en-US" altLang="ko-KR" sz="1200" dirty="0">
-                <ns1:solidFill>
-                  <ns1:schemeClr val="tx1">
-                    <ns1:lumMod val="75000"/>
-                    <ns1:lumOff val="25000"/>
-                  </ns1:schemeClr>
-                </ns1:solidFill>
-                <ns1:latin typeface="Pretendard" panose="02000503000000020004" pitchFamily="2" charset="-127"/>
-                <ns1:ea typeface="Pretendard" panose="02000503000000020004" pitchFamily="2" charset="-127"/>
-                <ns1:cs typeface="Pretendard" panose="02000503000000020004" pitchFamily="2" charset="-127"/>
-              </ns1:rPr>
-              <ns1:t/>
-            </ns1:r>
-            <ns1:r>
-              <ns1:rPr lang="en-US" altLang="ko-KR" sz="1200" dirty="0" err="1">
-                <ns1:solidFill>
-                  <ns1:schemeClr val="tx1">
-                    <ns1:lumMod val="75000"/>
-                    <ns1:lumOff val="25000"/>
-                  </ns1:schemeClr>
-                </ns1:solidFill>
-                <ns1:latin typeface="Pretendard" panose="02000503000000020004" pitchFamily="2" charset="-127"/>
-                <ns1:ea typeface="Pretendard" panose="02000503000000020004" pitchFamily="2" charset="-127"/>
-                <ns1:cs typeface="Pretendard" panose="02000503000000020004" pitchFamily="2" charset="-127"/>
-              </ns1:rPr>
-              <ns1:t/>
-            </ns1:r>
-            <ns1:r>
-              <ns1:rPr lang="en-US" altLang="ko-KR" sz="1200" dirty="0">
-                <ns1:solidFill>
-                  <ns1:schemeClr val="tx1">
-                    <ns1:lumMod val="75000"/>
-                    <ns1:lumOff val="25000"/>
-                  </ns1:schemeClr>
-                </ns1:solidFill>
-                <ns1:latin typeface="Pretendard" panose="02000503000000020004" pitchFamily="2" charset="-127"/>
-                <ns1:ea typeface="Pretendard" panose="02000503000000020004" pitchFamily="2" charset="-127"/>
-                <ns1:cs typeface="Pretendard" panose="02000503000000020004" pitchFamily="2" charset="-127"/>
-              </ns1:rPr>
-              <ns1:t/>
-            </ns1:r>
-            <ns1:r>
-              <ns1:rPr lang="en-US" altLang="ko-KR" sz="1200" dirty="0" err="1" smtClean="0">
-                <ns1:solidFill>
-                  <ns1:schemeClr val="tx1">
-                    <ns1:lumMod val="75000"/>
-                    <ns1:lumOff val="25000"/>
-                  </ns1:schemeClr>
-                </ns1:solidFill>
-                <ns1:latin typeface="Pretendard" panose="02000503000000020004" pitchFamily="2" charset="-127"/>
-                <ns1:ea typeface="Pretendard" panose="02000503000000020004" pitchFamily="2" charset="-127"/>
-                <ns1:cs typeface="Pretendard" panose="02000503000000020004" pitchFamily="2" charset="-127"/>
-              </ns1:rPr>
-              <ns1:t/>
-            </ns1:r>
-            <ns1:r>
-              <ns1:rPr lang="en-US" altLang="ko-KR" sz="1200" dirty="0" smtClean="0">
-                <ns1:solidFill>
-                  <ns1:schemeClr val="tx1">
-                    <ns1:lumMod val="75000"/>
-                    <ns1:lumOff val="25000"/>
-                  </ns1:schemeClr>
-                </ns1:solidFill>
-                <ns1:latin typeface="Pretendard" panose="02000503000000020004" pitchFamily="2" charset="-127"/>
-                <ns1:ea typeface="Pretendard" panose="02000503000000020004" pitchFamily="2" charset="-127"/>
-                <ns1:cs typeface="Pretendard" panose="02000503000000020004" pitchFamily="2" charset="-127"/>
-              </ns1:rPr>
-              <ns1:t/>
-            </ns1:r>
-            <ns1:r>
-              <ns1:rPr lang="en-US" altLang="ko-KR" sz="1200" dirty="0" err="1">
-                <ns1:solidFill>
-                  <ns1:schemeClr val="tx1">
-                    <ns1:lumMod val="75000"/>
-                    <ns1:lumOff val="25000"/>
-                  </ns1:schemeClr>
-                </ns1:solidFill>
-                <ns1:latin typeface="Pretendard" panose="02000503000000020004" pitchFamily="2" charset="-127"/>
-                <ns1:ea typeface="Pretendard" panose="02000503000000020004" pitchFamily="2" charset="-127"/>
-                <ns1:cs typeface="Pretendard" panose="02000503000000020004" pitchFamily="2" charset="-127"/>
-              </ns1:rPr>
-              <ns1:t/>
-            </ns1:r>
-            <ns1:r>
-              <ns1:rPr lang="en-US" altLang="ko-KR" sz="1200" dirty="0">
-                <ns1:solidFill>
-                  <ns1:schemeClr val="tx1">
-                    <ns1:lumMod val="75000"/>
-                    <ns1:lumOff val="25000"/>
-                  </ns1:schemeClr>
-                </ns1:solidFill>
-                <ns1:latin typeface="Pretendard" panose="02000503000000020004" pitchFamily="2" charset="-127"/>
-                <ns1:ea typeface="Pretendard" panose="02000503000000020004" pitchFamily="2" charset="-127"/>
-                <ns1:cs typeface="Pretendard" panose="02000503000000020004" pitchFamily="2" charset="-127"/>
-              </ns1:rPr>
-              <ns1:t/>
-            </ns1:r>
-            <ns1:r>
-              <ns1:rPr lang="en-US" altLang="ko-KR" sz="1200" dirty="0" err="1">
-                <ns1:solidFill>
-                  <ns1:schemeClr val="tx1">
-                    <ns1:lumMod val="75000"/>
-                    <ns1:lumOff val="25000"/>
-                  </ns1:schemeClr>
-                </ns1:solidFill>
-                <ns1:latin typeface="Pretendard" panose="02000503000000020004" pitchFamily="2" charset="-127"/>
-                <ns1:ea typeface="Pretendard" panose="02000503000000020004" pitchFamily="2" charset="-127"/>
-                <ns1:cs typeface="Pretendard" panose="02000503000000020004" pitchFamily="2" charset="-127"/>
-              </ns1:rPr>
-              <ns1:t/>
-            </ns1:r>
-            <ns1:r>
-              <ns1:rPr lang="en-US" altLang="ko-KR" sz="1200" dirty="0">
-                <ns1:solidFill>
-                  <ns1:schemeClr val="tx1">
-                    <ns1:lumMod val="75000"/>
-                    <ns1:lumOff val="25000"/>
-                  </ns1:schemeClr>
-                </ns1:solidFill>
-                <ns1:latin typeface="Pretendard" panose="02000503000000020004" pitchFamily="2" charset="-127"/>
-                <ns1:ea typeface="Pretendard" panose="02000503000000020004" pitchFamily="2" charset="-127"/>
-                <ns1:cs typeface="Pretendard" panose="02000503000000020004" pitchFamily="2" charset="-127"/>
-              </ns1:rPr>
-              <ns1:t/>
-            </ns1:r>
-            <ns1:r>
-              <ns1:rPr lang="en-US" altLang="ko-KR" sz="1200" dirty="0" err="1">
-                <ns1:solidFill>
-                  <ns1:schemeClr val="tx1">
-                    <ns1:lumMod val="75000"/>
-                    <ns1:lumOff val="25000"/>
-                  </ns1:schemeClr>
-                </ns1:solidFill>
-                <ns1:latin typeface="Pretendard" panose="02000503000000020004" pitchFamily="2" charset="-127"/>
-                <ns1:ea typeface="Pretendard" panose="02000503000000020004" pitchFamily="2" charset="-127"/>
-                <ns1:cs typeface="Pretendard" panose="02000503000000020004" pitchFamily="2" charset="-127"/>
-              </ns1:rPr>
-              <ns1:t/>
-            </ns1:r>
-            <ns1:r>
-              <ns1:rPr lang="en-US" altLang="ko-KR" sz="1200" dirty="0">
-                <ns1:solidFill>
-                  <ns1:schemeClr val="tx1">
-                    <ns1:lumMod val="75000"/>
-                    <ns1:lumOff val="25000"/>
-                  </ns1:schemeClr>
-                </ns1:solidFill>
-                <ns1:latin typeface="Pretendard" panose="02000503000000020004" pitchFamily="2" charset="-127"/>
-                <ns1:ea typeface="Pretendard" panose="02000503000000020004" pitchFamily="2" charset="-127"/>
-                <ns1:cs typeface="Pretendard" panose="02000503000000020004" pitchFamily="2" charset="-127"/>
-              </ns1:rPr>
-              <ns1:t/>
-            </ns1:r>
-            <ns1:r>
-              <ns1:rPr lang="en-US" altLang="ko-KR" sz="1200" dirty="0" err="1">
-                <ns1:solidFill>
-                  <ns1:schemeClr val="tx1">
-                    <ns1:lumMod val="75000"/>
-                    <ns1:lumOff val="25000"/>
-                  </ns1:schemeClr>
-                </ns1:solidFill>
-                <ns1:latin typeface="Pretendard" panose="02000503000000020004" pitchFamily="2" charset="-127"/>
-                <ns1:ea typeface="Pretendard" panose="02000503000000020004" pitchFamily="2" charset="-127"/>
-                <ns1:cs typeface="Pretendard" panose="02000503000000020004" pitchFamily="2" charset="-127"/>
-              </ns1:rPr>
-              <ns1:t/>
-            </ns1:r>
-            <ns1:r>
-              <ns1:rPr lang="en-US" altLang="ko-KR" sz="1200" dirty="0">
-                <ns1:solidFill>
-                  <ns1:schemeClr val="tx1">
-                    <ns1:lumMod val="75000"/>
-                    <ns1:lumOff val="25000"/>
-                  </ns1:schemeClr>
-                </ns1:solidFill>
-                <ns1:latin typeface="Pretendard" panose="02000503000000020004" pitchFamily="2" charset="-127"/>
-                <ns1:ea typeface="Pretendard" panose="02000503000000020004" pitchFamily="2" charset="-127"/>
-                <ns1:cs typeface="Pretendard" panose="02000503000000020004" pitchFamily="2" charset="-127"/>
-              </ns1:rPr>
-              <ns1:t/>
-            </ns1:r>
-            <ns1:r>
-              <ns1:rPr lang="en-US" altLang="ko-KR" sz="1200" dirty="0" err="1" smtClean="0">
-                <ns1:solidFill>
-                  <ns1:schemeClr val="tx1">
-                    <ns1:lumMod val="75000"/>
-                    <ns1:lumOff val="25000"/>
-                  </ns1:schemeClr>
-                </ns1:solidFill>
-                <ns1:latin typeface="Pretendard" panose="02000503000000020004" pitchFamily="2" charset="-127"/>
-                <ns1:ea typeface="Pretendard" panose="02000503000000020004" pitchFamily="2" charset="-127"/>
-                <ns1:cs typeface="Pretendard" panose="02000503000000020004" pitchFamily="2" charset="-127"/>
-              </ns1:rPr>
-              <ns1:t/>
-            </ns1:r>
             <ns1:endParaRPr lang="en-US" altLang="ko-KR" sz="1200" dirty="0" smtClean="0">
               <ns1:solidFill>
                 <ns1:schemeClr val="tx1">
@@ -15982,118 +15758,6 @@
             </ns1:endParaRPr>
           </ns1:p>
           <ns1:p>
-            <ns1:r>
-              <ns1:rPr lang="en-US" altLang="ko-KR" sz="1200" dirty="0" err="1" smtClean="0">
-                <ns1:solidFill>
-                  <ns1:schemeClr val="tx1">
-                    <ns1:lumMod val="75000"/>
-                    <ns1:lumOff val="25000"/>
-                  </ns1:schemeClr>
-                </ns1:solidFill>
-                <ns1:latin typeface="Pretendard" panose="02000503000000020004" pitchFamily="2" charset="-127"/>
-                <ns1:ea typeface="Pretendard" panose="02000503000000020004" pitchFamily="2" charset="-127"/>
-                <ns1:cs typeface="Pretendard" panose="02000503000000020004" pitchFamily="2" charset="-127"/>
-              </ns1:rPr>
-              <ns1:t/>
-            </ns1:r>
-            <ns1:r>
-              <ns1:rPr lang="en-US" altLang="ko-KR" sz="1200" dirty="0" smtClean="0">
-                <ns1:solidFill>
-                  <ns1:schemeClr val="tx1">
-                    <ns1:lumMod val="75000"/>
-                    <ns1:lumOff val="25000"/>
-                  </ns1:schemeClr>
-                </ns1:solidFill>
-                <ns1:latin typeface="Pretendard" panose="02000503000000020004" pitchFamily="2" charset="-127"/>
-                <ns1:ea typeface="Pretendard" panose="02000503000000020004" pitchFamily="2" charset="-127"/>
-                <ns1:cs typeface="Pretendard" panose="02000503000000020004" pitchFamily="2" charset="-127"/>
-              </ns1:rPr>
-              <ns1:t/>
-            </ns1:r>
-            <ns1:r>
-              <ns1:rPr lang="en-US" altLang="ko-KR" sz="1200" dirty="0" err="1">
-                <ns1:solidFill>
-                  <ns1:schemeClr val="tx1">
-                    <ns1:lumMod val="75000"/>
-                    <ns1:lumOff val="25000"/>
-                  </ns1:schemeClr>
-                </ns1:solidFill>
-                <ns1:latin typeface="Pretendard" panose="02000503000000020004" pitchFamily="2" charset="-127"/>
-                <ns1:ea typeface="Pretendard" panose="02000503000000020004" pitchFamily="2" charset="-127"/>
-                <ns1:cs typeface="Pretendard" panose="02000503000000020004" pitchFamily="2" charset="-127"/>
-              </ns1:rPr>
-              <ns1:t/>
-            </ns1:r>
-            <ns1:r>
-              <ns1:rPr lang="en-US" altLang="ko-KR" sz="1200" dirty="0">
-                <ns1:solidFill>
-                  <ns1:schemeClr val="tx1">
-                    <ns1:lumMod val="75000"/>
-                    <ns1:lumOff val="25000"/>
-                  </ns1:schemeClr>
-                </ns1:solidFill>
-                <ns1:latin typeface="Pretendard" panose="02000503000000020004" pitchFamily="2" charset="-127"/>
-                <ns1:ea typeface="Pretendard" panose="02000503000000020004" pitchFamily="2" charset="-127"/>
-                <ns1:cs typeface="Pretendard" panose="02000503000000020004" pitchFamily="2" charset="-127"/>
-              </ns1:rPr>
-              <ns1:t/>
-            </ns1:r>
-            <ns1:r>
-              <ns1:rPr lang="en-US" altLang="ko-KR" sz="1200" dirty="0" err="1">
-                <ns1:solidFill>
-                  <ns1:schemeClr val="tx1">
-                    <ns1:lumMod val="75000"/>
-                    <ns1:lumOff val="25000"/>
-                  </ns1:schemeClr>
-                </ns1:solidFill>
-                <ns1:latin typeface="Pretendard" panose="02000503000000020004" pitchFamily="2" charset="-127"/>
-                <ns1:ea typeface="Pretendard" panose="02000503000000020004" pitchFamily="2" charset="-127"/>
-                <ns1:cs typeface="Pretendard" panose="02000503000000020004" pitchFamily="2" charset="-127"/>
-              </ns1:rPr>
-              <ns1:t/>
-            </ns1:r>
-            <ns1:r>
-              <ns1:rPr lang="en-US" altLang="ko-KR" sz="1200" dirty="0">
-                <ns1:solidFill>
-                  <ns1:schemeClr val="tx1">
-                    <ns1:lumMod val="75000"/>
-                    <ns1:lumOff val="25000"/>
-                  </ns1:schemeClr>
-                </ns1:solidFill>
-                <ns1:latin typeface="Pretendard" panose="02000503000000020004" pitchFamily="2" charset="-127"/>
-                <ns1:ea typeface="Pretendard" panose="02000503000000020004" pitchFamily="2" charset="-127"/>
-                <ns1:cs typeface="Pretendard" panose="02000503000000020004" pitchFamily="2" charset="-127"/>
-              </ns1:rPr>
-              <ns1:t/>
-            </ns1:r>
-            <ns1:r>
-              <ns1:rPr lang="en-US" altLang="ko-KR" sz="1200" dirty="0" err="1">
-                <ns1:solidFill>
-                  <ns1:schemeClr val="tx1">
-                    <ns1:lumMod val="75000"/>
-                    <ns1:lumOff val="25000"/>
-                  </ns1:schemeClr>
-                </ns1:solidFill>
-                <ns1:latin typeface="Pretendard" panose="02000503000000020004" pitchFamily="2" charset="-127"/>
-                <ns1:ea typeface="Pretendard" panose="02000503000000020004" pitchFamily="2" charset="-127"/>
-                <ns1:cs typeface="Pretendard" panose="02000503000000020004" pitchFamily="2" charset="-127"/>
-              </ns1:rPr>
-              <ns1:t/>
-            </ns1:r>
-            <ns1:r>
-              <ns1:rPr lang="en-US" altLang="ko-KR" sz="1200" dirty="0">
-                <ns1:solidFill>
-                  <ns1:schemeClr val="tx1">
-                    <ns1:lumMod val="75000"/>
-                    <ns1:lumOff val="25000"/>
-                  </ns1:schemeClr>
-                </ns1:solidFill>
-                <ns1:latin typeface="Pretendard" panose="02000503000000020004" pitchFamily="2" charset="-127"/>
-                <ns1:ea typeface="Pretendard" panose="02000503000000020004" pitchFamily="2" charset="-127"/>
-                <ns1:cs typeface="Pretendard" panose="02000503000000020004" pitchFamily="2" charset="-127"/>
-              </ns1:rPr>
-              <ns1:t/>
-            </ns1:r>
             <ns1:endParaRPr lang="en-US" sz="1200" dirty="0">
               <ns1:solidFill>
                 <ns1:schemeClr val="tx1">
@@ -16155,20 +15819,6 @@
                 <ns1:spcPct val="150000"/>
               </ns1:lnSpc>
             </ns1:pPr>
-            <ns1:r>
-              <ns1:rPr lang="ko-KR" altLang="ko-KR" sz="1200" dirty="0" smtClean="0">
-                <ns1:solidFill>
-                  <ns1:schemeClr val="tx1">
-                    <ns1:lumMod val="75000"/>
-                    <ns1:lumOff val="25000"/>
-                  </ns1:schemeClr>
-                </ns1:solidFill>
-                <ns1:latin typeface="Pretendard" panose="02000503000000020004" pitchFamily="2" charset="-127"/>
-                <ns1:ea typeface="Pretendard" panose="02000503000000020004" pitchFamily="2" charset="-127"/>
-                <ns1:cs typeface="Pretendard" panose="02000503000000020004" pitchFamily="2" charset="-127"/>
-              </ns1:rPr>
-              <ns1:t>병렬 처리·장거리 의존성 모델링. RNN 한계 극복.</ns1:t>
-            </ns1:r>
             <ns1:endParaRPr lang="en-US" altLang="ko-KR" sz="1200" dirty="0">
               <ns1:solidFill>
                 <ns1:schemeClr val="tx1">
@@ -16187,188 +15837,6 @@
                 <ns1:spcPct val="150000"/>
               </ns1:lnSpc>
             </ns1:pPr>
-            <ns1:r>
-              <ns1:rPr lang="en-US" altLang="ko-KR" sz="1200" dirty="0" err="1" smtClean="0">
-                <ns1:solidFill>
-                  <ns1:schemeClr val="tx1">
-                    <ns1:lumMod val="75000"/>
-                    <ns1:lumOff val="25000"/>
-                  </ns1:schemeClr>
-                </ns1:solidFill>
-                <ns1:latin typeface="Pretendard" panose="02000503000000020004" pitchFamily="2" charset="-127"/>
-                <ns1:ea typeface="Pretendard" panose="02000503000000020004" pitchFamily="2" charset="-127"/>
-                <ns1:cs typeface="Pretendard" panose="02000503000000020004" pitchFamily="2" charset="-127"/>
-              </ns1:rPr>
-              <ns1:t/>
-            </ns1:r>
-            <ns1:r>
-              <ns1:rPr lang="en-US" altLang="ko-KR" sz="1200" dirty="0">
-                <ns1:solidFill>
-                  <ns1:schemeClr val="tx1">
-                    <ns1:lumMod val="75000"/>
-                    <ns1:lumOff val="25000"/>
-                  </ns1:schemeClr>
-                </ns1:solidFill>
-                <ns1:latin typeface="Pretendard" panose="02000503000000020004" pitchFamily="2" charset="-127"/>
-                <ns1:ea typeface="Pretendard" panose="02000503000000020004" pitchFamily="2" charset="-127"/>
-                <ns1:cs typeface="Pretendard" panose="02000503000000020004" pitchFamily="2" charset="-127"/>
-              </ns1:rPr>
-              <ns1:t/>
-            </ns1:r>
-            <ns1:r>
-              <ns1:rPr lang="en-US" altLang="ko-KR" sz="1200" dirty="0" err="1">
-                <ns1:solidFill>
-                  <ns1:schemeClr val="tx1">
-                    <ns1:lumMod val="75000"/>
-                    <ns1:lumOff val="25000"/>
-                  </ns1:schemeClr>
-                </ns1:solidFill>
-                <ns1:latin typeface="Pretendard" panose="02000503000000020004" pitchFamily="2" charset="-127"/>
-                <ns1:ea typeface="Pretendard" panose="02000503000000020004" pitchFamily="2" charset="-127"/>
-                <ns1:cs typeface="Pretendard" panose="02000503000000020004" pitchFamily="2" charset="-127"/>
-              </ns1:rPr>
-              <ns1:t/>
-            </ns1:r>
-            <ns1:r>
-              <ns1:rPr lang="en-US" altLang="ko-KR" sz="1200" dirty="0">
-                <ns1:solidFill>
-                  <ns1:schemeClr val="tx1">
-                    <ns1:lumMod val="75000"/>
-                    <ns1:lumOff val="25000"/>
-                  </ns1:schemeClr>
-                </ns1:solidFill>
-                <ns1:latin typeface="Pretendard" panose="02000503000000020004" pitchFamily="2" charset="-127"/>
-                <ns1:ea typeface="Pretendard" panose="02000503000000020004" pitchFamily="2" charset="-127"/>
-                <ns1:cs typeface="Pretendard" panose="02000503000000020004" pitchFamily="2" charset="-127"/>
-              </ns1:rPr>
-              <ns1:t/>
-            </ns1:r>
-            <ns1:r>
-              <ns1:rPr lang="en-US" altLang="ko-KR" sz="1200" dirty="0" err="1">
-                <ns1:solidFill>
-                  <ns1:schemeClr val="tx1">
-                    <ns1:lumMod val="75000"/>
-                    <ns1:lumOff val="25000"/>
-                  </ns1:schemeClr>
-                </ns1:solidFill>
-                <ns1:latin typeface="Pretendard" panose="02000503000000020004" pitchFamily="2" charset="-127"/>
-                <ns1:ea typeface="Pretendard" panose="02000503000000020004" pitchFamily="2" charset="-127"/>
-                <ns1:cs typeface="Pretendard" panose="02000503000000020004" pitchFamily="2" charset="-127"/>
-              </ns1:rPr>
-              <ns1:t/>
-            </ns1:r>
-            <ns1:r>
-              <ns1:rPr lang="en-US" altLang="ko-KR" sz="1200" dirty="0">
-                <ns1:solidFill>
-                  <ns1:schemeClr val="tx1">
-                    <ns1:lumMod val="75000"/>
-                    <ns1:lumOff val="25000"/>
-                  </ns1:schemeClr>
-                </ns1:solidFill>
-                <ns1:latin typeface="Pretendard" panose="02000503000000020004" pitchFamily="2" charset="-127"/>
-                <ns1:ea typeface="Pretendard" panose="02000503000000020004" pitchFamily="2" charset="-127"/>
-                <ns1:cs typeface="Pretendard" panose="02000503000000020004" pitchFamily="2" charset="-127"/>
-              </ns1:rPr>
-              <ns1:t/>
-            </ns1:r>
-            <ns1:r>
-              <ns1:rPr lang="en-US" altLang="ko-KR" sz="1200" dirty="0" err="1" smtClean="0">
-                <ns1:solidFill>
-                  <ns1:schemeClr val="tx1">
-                    <ns1:lumMod val="75000"/>
-                    <ns1:lumOff val="25000"/>
-                  </ns1:schemeClr>
-                </ns1:solidFill>
-                <ns1:latin typeface="Pretendard" panose="02000503000000020004" pitchFamily="2" charset="-127"/>
-                <ns1:ea typeface="Pretendard" panose="02000503000000020004" pitchFamily="2" charset="-127"/>
-                <ns1:cs typeface="Pretendard" panose="02000503000000020004" pitchFamily="2" charset="-127"/>
-              </ns1:rPr>
-              <ns1:t/>
-            </ns1:r>
-            <ns1:r>
-              <ns1:rPr lang="en-US" altLang="ko-KR" sz="1200" dirty="0">
-                <ns1:solidFill>
-                  <ns1:schemeClr val="tx1">
-                    <ns1:lumMod val="75000"/>
-                    <ns1:lumOff val="25000"/>
-                  </ns1:schemeClr>
-                </ns1:solidFill>
-                <ns1:latin typeface="Pretendard" panose="02000503000000020004" pitchFamily="2" charset="-127"/>
-                <ns1:ea typeface="Pretendard" panose="02000503000000020004" pitchFamily="2" charset="-127"/>
-                <ns1:cs typeface="Pretendard" panose="02000503000000020004" pitchFamily="2" charset="-127"/>
-              </ns1:rPr>
-              <ns1:t/>
-            </ns1:r>
-            <ns1:r>
-              <ns1:rPr lang="en-US" altLang="ko-KR" sz="1200" dirty="0" err="1" smtClean="0">
-                <ns1:solidFill>
-                  <ns1:schemeClr val="tx1">
-                    <ns1:lumMod val="75000"/>
-                    <ns1:lumOff val="25000"/>
-                  </ns1:schemeClr>
-                </ns1:solidFill>
-                <ns1:latin typeface="Pretendard" panose="02000503000000020004" pitchFamily="2" charset="-127"/>
-                <ns1:ea typeface="Pretendard" panose="02000503000000020004" pitchFamily="2" charset="-127"/>
-                <ns1:cs typeface="Pretendard" panose="02000503000000020004" pitchFamily="2" charset="-127"/>
-              </ns1:rPr>
-              <ns1:t/>
-            </ns1:r>
-            <ns1:r>
-              <ns1:rPr lang="en-US" altLang="ko-KR" sz="1200" dirty="0" smtClean="0">
-                <ns1:solidFill>
-                  <ns1:schemeClr val="tx1">
-                    <ns1:lumMod val="75000"/>
-                    <ns1:lumOff val="25000"/>
-                  </ns1:schemeClr>
-                </ns1:solidFill>
-                <ns1:latin typeface="Pretendard" panose="02000503000000020004" pitchFamily="2" charset="-127"/>
-                <ns1:ea typeface="Pretendard" panose="02000503000000020004" pitchFamily="2" charset="-127"/>
-                <ns1:cs typeface="Pretendard" panose="02000503000000020004" pitchFamily="2" charset="-127"/>
-              </ns1:rPr>
-              <ns1:t/>
-            </ns1:r>
-            <ns1:r>
-              <ns1:rPr lang="en-US" altLang="ko-KR" sz="1200" dirty="0" err="1">
-                <ns1:solidFill>
-                  <ns1:schemeClr val="tx1">
-                    <ns1:lumMod val="75000"/>
-                    <ns1:lumOff val="25000"/>
-                  </ns1:schemeClr>
-                </ns1:solidFill>
-                <ns1:latin typeface="Pretendard" panose="02000503000000020004" pitchFamily="2" charset="-127"/>
-                <ns1:ea typeface="Pretendard" panose="02000503000000020004" pitchFamily="2" charset="-127"/>
-                <ns1:cs typeface="Pretendard" panose="02000503000000020004" pitchFamily="2" charset="-127"/>
-              </ns1:rPr>
-              <ns1:t/>
-            </ns1:r>
-            <ns1:r>
-              <ns1:rPr lang="en-US" altLang="ko-KR" sz="1200" dirty="0">
-                <ns1:solidFill>
-                  <ns1:schemeClr val="tx1">
-                    <ns1:lumMod val="75000"/>
-                    <ns1:lumOff val="25000"/>
-                  </ns1:schemeClr>
-                </ns1:solidFill>
-                <ns1:latin typeface="Pretendard" panose="02000503000000020004" pitchFamily="2" charset="-127"/>
-                <ns1:ea typeface="Pretendard" panose="02000503000000020004" pitchFamily="2" charset="-127"/>
-                <ns1:cs typeface="Pretendard" panose="02000503000000020004" pitchFamily="2" charset="-127"/>
-              </ns1:rPr>
-              <ns1:t/>
-            </ns1:r>
-            <ns1:r>
-              <ns1:rPr lang="en-US" altLang="ko-KR" sz="1200" dirty="0" err="1" smtClean="0">
-                <ns1:solidFill>
-                  <ns1:schemeClr val="tx1">
-                    <ns1:lumMod val="75000"/>
-                    <ns1:lumOff val="25000"/>
-                  </ns1:schemeClr>
-                </ns1:solidFill>
-                <ns1:latin typeface="Pretendard" panose="02000503000000020004" pitchFamily="2" charset="-127"/>
-                <ns1:ea typeface="Pretendard" panose="02000503000000020004" pitchFamily="2" charset="-127"/>
-                <ns1:cs typeface="Pretendard" panose="02000503000000020004" pitchFamily="2" charset="-127"/>
-              </ns1:rPr>
-              <ns1:t/>
-            </ns1:r>
             <ns1:endParaRPr lang="en-US" altLang="ko-KR" sz="1200" dirty="0" smtClean="0">
               <ns1:solidFill>
                 <ns1:schemeClr val="tx1">
@@ -16387,188 +15855,6 @@
                 <ns1:spcPct val="150000"/>
               </ns1:lnSpc>
             </ns1:pPr>
-            <ns1:r>
-              <ns1:rPr lang="en-US" altLang="ko-KR" sz="1200" dirty="0" err="1">
-                <ns1:solidFill>
-                  <ns1:schemeClr val="tx1">
-                    <ns1:lumMod val="75000"/>
-                    <ns1:lumOff val="25000"/>
-                  </ns1:schemeClr>
-                </ns1:solidFill>
-                <ns1:latin typeface="Pretendard" panose="02000503000000020004" pitchFamily="2" charset="-127"/>
-                <ns1:ea typeface="Pretendard" panose="02000503000000020004" pitchFamily="2" charset="-127"/>
-                <ns1:cs typeface="Pretendard" panose="02000503000000020004" pitchFamily="2" charset="-127"/>
-              </ns1:rPr>
-              <ns1:t/>
-            </ns1:r>
-            <ns1:r>
-              <ns1:rPr lang="en-US" altLang="ko-KR" sz="1200" dirty="0">
-                <ns1:solidFill>
-                  <ns1:schemeClr val="tx1">
-                    <ns1:lumMod val="75000"/>
-                    <ns1:lumOff val="25000"/>
-                  </ns1:schemeClr>
-                </ns1:solidFill>
-                <ns1:latin typeface="Pretendard" panose="02000503000000020004" pitchFamily="2" charset="-127"/>
-                <ns1:ea typeface="Pretendard" panose="02000503000000020004" pitchFamily="2" charset="-127"/>
-                <ns1:cs typeface="Pretendard" panose="02000503000000020004" pitchFamily="2" charset="-127"/>
-              </ns1:rPr>
-              <ns1:t/>
-            </ns1:r>
-            <ns1:r>
-              <ns1:rPr lang="en-US" altLang="ko-KR" sz="1200" dirty="0" err="1">
-                <ns1:solidFill>
-                  <ns1:schemeClr val="tx1">
-                    <ns1:lumMod val="75000"/>
-                    <ns1:lumOff val="25000"/>
-                  </ns1:schemeClr>
-                </ns1:solidFill>
-                <ns1:latin typeface="Pretendard" panose="02000503000000020004" pitchFamily="2" charset="-127"/>
-                <ns1:ea typeface="Pretendard" panose="02000503000000020004" pitchFamily="2" charset="-127"/>
-                <ns1:cs typeface="Pretendard" panose="02000503000000020004" pitchFamily="2" charset="-127"/>
-              </ns1:rPr>
-              <ns1:t/>
-            </ns1:r>
-            <ns1:r>
-              <ns1:rPr lang="en-US" altLang="ko-KR" sz="1200" dirty="0">
-                <ns1:solidFill>
-                  <ns1:schemeClr val="tx1">
-                    <ns1:lumMod val="75000"/>
-                    <ns1:lumOff val="25000"/>
-                  </ns1:schemeClr>
-                </ns1:solidFill>
-                <ns1:latin typeface="Pretendard" panose="02000503000000020004" pitchFamily="2" charset="-127"/>
-                <ns1:ea typeface="Pretendard" panose="02000503000000020004" pitchFamily="2" charset="-127"/>
-                <ns1:cs typeface="Pretendard" panose="02000503000000020004" pitchFamily="2" charset="-127"/>
-              </ns1:rPr>
-              <ns1:t/>
-            </ns1:r>
-            <ns1:r>
-              <ns1:rPr lang="en-US" altLang="ko-KR" sz="1200" dirty="0" err="1">
-                <ns1:solidFill>
-                  <ns1:schemeClr val="tx1">
-                    <ns1:lumMod val="75000"/>
-                    <ns1:lumOff val="25000"/>
-                  </ns1:schemeClr>
-                </ns1:solidFill>
-                <ns1:latin typeface="Pretendard" panose="02000503000000020004" pitchFamily="2" charset="-127"/>
-                <ns1:ea typeface="Pretendard" panose="02000503000000020004" pitchFamily="2" charset="-127"/>
-                <ns1:cs typeface="Pretendard" panose="02000503000000020004" pitchFamily="2" charset="-127"/>
-              </ns1:rPr>
-              <ns1:t/>
-            </ns1:r>
-            <ns1:r>
-              <ns1:rPr lang="en-US" altLang="ko-KR" sz="1200" dirty="0">
-                <ns1:solidFill>
-                  <ns1:schemeClr val="tx1">
-                    <ns1:lumMod val="75000"/>
-                    <ns1:lumOff val="25000"/>
-                  </ns1:schemeClr>
-                </ns1:solidFill>
-                <ns1:latin typeface="Pretendard" panose="02000503000000020004" pitchFamily="2" charset="-127"/>
-                <ns1:ea typeface="Pretendard" panose="02000503000000020004" pitchFamily="2" charset="-127"/>
-                <ns1:cs typeface="Pretendard" panose="02000503000000020004" pitchFamily="2" charset="-127"/>
-              </ns1:rPr>
-              <ns1:t/>
-            </ns1:r>
-            <ns1:r>
-              <ns1:rPr lang="en-US" altLang="ko-KR" sz="1200" dirty="0" err="1">
-                <ns1:solidFill>
-                  <ns1:schemeClr val="tx1">
-                    <ns1:lumMod val="75000"/>
-                    <ns1:lumOff val="25000"/>
-                  </ns1:schemeClr>
-                </ns1:solidFill>
-                <ns1:latin typeface="Pretendard" panose="02000503000000020004" pitchFamily="2" charset="-127"/>
-                <ns1:ea typeface="Pretendard" panose="02000503000000020004" pitchFamily="2" charset="-127"/>
-                <ns1:cs typeface="Pretendard" panose="02000503000000020004" pitchFamily="2" charset="-127"/>
-              </ns1:rPr>
-              <ns1:t/>
-            </ns1:r>
-            <ns1:r>
-              <ns1:rPr lang="en-US" altLang="ko-KR" sz="1200" dirty="0">
-                <ns1:solidFill>
-                  <ns1:schemeClr val="tx1">
-                    <ns1:lumMod val="75000"/>
-                    <ns1:lumOff val="25000"/>
-                  </ns1:schemeClr>
-                </ns1:solidFill>
-                <ns1:latin typeface="Pretendard" panose="02000503000000020004" pitchFamily="2" charset="-127"/>
-                <ns1:ea typeface="Pretendard" panose="02000503000000020004" pitchFamily="2" charset="-127"/>
-                <ns1:cs typeface="Pretendard" panose="02000503000000020004" pitchFamily="2" charset="-127"/>
-              </ns1:rPr>
-              <ns1:t/>
-            </ns1:r>
-            <ns1:r>
-              <ns1:rPr lang="en-US" altLang="ko-KR" sz="1200" dirty="0" err="1">
-                <ns1:solidFill>
-                  <ns1:schemeClr val="tx1">
-                    <ns1:lumMod val="75000"/>
-                    <ns1:lumOff val="25000"/>
-                  </ns1:schemeClr>
-                </ns1:solidFill>
-                <ns1:latin typeface="Pretendard" panose="02000503000000020004" pitchFamily="2" charset="-127"/>
-                <ns1:ea typeface="Pretendard" panose="02000503000000020004" pitchFamily="2" charset="-127"/>
-                <ns1:cs typeface="Pretendard" panose="02000503000000020004" pitchFamily="2" charset="-127"/>
-              </ns1:rPr>
-              <ns1:t/>
-            </ns1:r>
-            <ns1:r>
-              <ns1:rPr lang="en-US" altLang="ko-KR" sz="1200" dirty="0">
-                <ns1:solidFill>
-                  <ns1:schemeClr val="tx1">
-                    <ns1:lumMod val="75000"/>
-                    <ns1:lumOff val="25000"/>
-                  </ns1:schemeClr>
-                </ns1:solidFill>
-                <ns1:latin typeface="Pretendard" panose="02000503000000020004" pitchFamily="2" charset="-127"/>
-                <ns1:ea typeface="Pretendard" panose="02000503000000020004" pitchFamily="2" charset="-127"/>
-                <ns1:cs typeface="Pretendard" panose="02000503000000020004" pitchFamily="2" charset="-127"/>
-              </ns1:rPr>
-              <ns1:t/>
-            </ns1:r>
-            <ns1:r>
-              <ns1:rPr lang="en-US" altLang="ko-KR" sz="1200" dirty="0" err="1">
-                <ns1:solidFill>
-                  <ns1:schemeClr val="tx1">
-                    <ns1:lumMod val="75000"/>
-                    <ns1:lumOff val="25000"/>
-                  </ns1:schemeClr>
-                </ns1:solidFill>
-                <ns1:latin typeface="Pretendard" panose="02000503000000020004" pitchFamily="2" charset="-127"/>
-                <ns1:ea typeface="Pretendard" panose="02000503000000020004" pitchFamily="2" charset="-127"/>
-                <ns1:cs typeface="Pretendard" panose="02000503000000020004" pitchFamily="2" charset="-127"/>
-              </ns1:rPr>
-              <ns1:t/>
-            </ns1:r>
-            <ns1:r>
-              <ns1:rPr lang="en-US" altLang="ko-KR" sz="1200" dirty="0">
-                <ns1:solidFill>
-                  <ns1:schemeClr val="tx1">
-                    <ns1:lumMod val="75000"/>
-                    <ns1:lumOff val="25000"/>
-                  </ns1:schemeClr>
-                </ns1:solidFill>
-                <ns1:latin typeface="Pretendard" panose="02000503000000020004" pitchFamily="2" charset="-127"/>
-                <ns1:ea typeface="Pretendard" panose="02000503000000020004" pitchFamily="2" charset="-127"/>
-                <ns1:cs typeface="Pretendard" panose="02000503000000020004" pitchFamily="2" charset="-127"/>
-              </ns1:rPr>
-              <ns1:t/>
-            </ns1:r>
-            <ns1:r>
-              <ns1:rPr lang="en-US" altLang="ko-KR" sz="1200" dirty="0" err="1">
-                <ns1:solidFill>
-                  <ns1:schemeClr val="tx1">
-                    <ns1:lumMod val="75000"/>
-                    <ns1:lumOff val="25000"/>
-                  </ns1:schemeClr>
-                </ns1:solidFill>
-                <ns1:latin typeface="Pretendard" panose="02000503000000020004" pitchFamily="2" charset="-127"/>
-                <ns1:ea typeface="Pretendard" panose="02000503000000020004" pitchFamily="2" charset="-127"/>
-                <ns1:cs typeface="Pretendard" panose="02000503000000020004" pitchFamily="2" charset="-127"/>
-              </ns1:rPr>
-              <ns1:t/>
-            </ns1:r>
             <ns1:endParaRPr lang="en-US" altLang="ko-KR" sz="1200" dirty="0">
               <ns1:solidFill>
                 <ns1:schemeClr val="tx1">
@@ -16648,20 +15934,6 @@
                 <ns1:spcPct val="150000"/>
               </ns1:lnSpc>
             </ns1:pPr>
-            <ns1:r>
-              <ns1:rPr lang="ko-KR" altLang="ko-KR" sz="1200" dirty="0" smtClean="0">
-                <ns1:solidFill>
-                  <ns1:schemeClr val="tx1">
-                    <ns1:lumMod val="75000"/>
-                    <ns1:lumOff val="25000"/>
-                  </ns1:schemeClr>
-                </ns1:solidFill>
-                <ns1:latin typeface="Pretendard" panose="02000503000000020004" pitchFamily="2" charset="-127"/>
-                <ns1:ea typeface="Pretendard" panose="02000503000000020004" pitchFamily="2" charset="-127"/>
-                <ns1:cs typeface="Pretendard" panose="02000503000000020004" pitchFamily="2" charset="-127"/>
-              </ns1:rPr>
-              <ns1:t>ChatGPT·Claude 핵심 학습 기법.</ns1:t>
-            </ns1:r>
             <ns1:endParaRPr lang="en-US" altLang="ko-KR" sz="1200" dirty="0">
               <ns1:solidFill>
                 <ns1:schemeClr val="tx1">
@@ -16680,188 +15952,6 @@
                 <ns1:spcPct val="150000"/>
               </ns1:lnSpc>
             </ns1:pPr>
-            <ns1:r>
-              <ns1:rPr lang="en-US" altLang="ko-KR" sz="1200" dirty="0" err="1" smtClean="0">
-                <ns1:solidFill>
-                  <ns1:schemeClr val="tx1">
-                    <ns1:lumMod val="75000"/>
-                    <ns1:lumOff val="25000"/>
-                  </ns1:schemeClr>
-                </ns1:solidFill>
-                <ns1:latin typeface="Pretendard" panose="02000503000000020004" pitchFamily="2" charset="-127"/>
-                <ns1:ea typeface="Pretendard" panose="02000503000000020004" pitchFamily="2" charset="-127"/>
-                <ns1:cs typeface="Pretendard" panose="02000503000000020004" pitchFamily="2" charset="-127"/>
-              </ns1:rPr>
-              <ns1:t/>
-            </ns1:r>
-            <ns1:r>
-              <ns1:rPr lang="en-US" altLang="ko-KR" sz="1200" dirty="0">
-                <ns1:solidFill>
-                  <ns1:schemeClr val="tx1">
-                    <ns1:lumMod val="75000"/>
-                    <ns1:lumOff val="25000"/>
-                  </ns1:schemeClr>
-                </ns1:solidFill>
-                <ns1:latin typeface="Pretendard" panose="02000503000000020004" pitchFamily="2" charset="-127"/>
-                <ns1:ea typeface="Pretendard" panose="02000503000000020004" pitchFamily="2" charset="-127"/>
-                <ns1:cs typeface="Pretendard" panose="02000503000000020004" pitchFamily="2" charset="-127"/>
-              </ns1:rPr>
-              <ns1:t/>
-            </ns1:r>
-            <ns1:r>
-              <ns1:rPr lang="en-US" altLang="ko-KR" sz="1200" dirty="0" err="1">
-                <ns1:solidFill>
-                  <ns1:schemeClr val="tx1">
-                    <ns1:lumMod val="75000"/>
-                    <ns1:lumOff val="25000"/>
-                  </ns1:schemeClr>
-                </ns1:solidFill>
-                <ns1:latin typeface="Pretendard" panose="02000503000000020004" pitchFamily="2" charset="-127"/>
-                <ns1:ea typeface="Pretendard" panose="02000503000000020004" pitchFamily="2" charset="-127"/>
-                <ns1:cs typeface="Pretendard" panose="02000503000000020004" pitchFamily="2" charset="-127"/>
-              </ns1:rPr>
-              <ns1:t/>
-            </ns1:r>
-            <ns1:r>
-              <ns1:rPr lang="en-US" altLang="ko-KR" sz="1200" dirty="0">
-                <ns1:solidFill>
-                  <ns1:schemeClr val="tx1">
-                    <ns1:lumMod val="75000"/>
-                    <ns1:lumOff val="25000"/>
-                  </ns1:schemeClr>
-                </ns1:solidFill>
-                <ns1:latin typeface="Pretendard" panose="02000503000000020004" pitchFamily="2" charset="-127"/>
-                <ns1:ea typeface="Pretendard" panose="02000503000000020004" pitchFamily="2" charset="-127"/>
-                <ns1:cs typeface="Pretendard" panose="02000503000000020004" pitchFamily="2" charset="-127"/>
-              </ns1:rPr>
-              <ns1:t/>
-            </ns1:r>
-            <ns1:r>
-              <ns1:rPr lang="en-US" altLang="ko-KR" sz="1200" dirty="0" err="1">
-                <ns1:solidFill>
-                  <ns1:schemeClr val="tx1">
-                    <ns1:lumMod val="75000"/>
-                    <ns1:lumOff val="25000"/>
-                  </ns1:schemeClr>
-                </ns1:solidFill>
-                <ns1:latin typeface="Pretendard" panose="02000503000000020004" pitchFamily="2" charset="-127"/>
-                <ns1:ea typeface="Pretendard" panose="02000503000000020004" pitchFamily="2" charset="-127"/>
-                <ns1:cs typeface="Pretendard" panose="02000503000000020004" pitchFamily="2" charset="-127"/>
-              </ns1:rPr>
-              <ns1:t/>
-            </ns1:r>
-            <ns1:r>
-              <ns1:rPr lang="en-US" altLang="ko-KR" sz="1200" dirty="0">
-                <ns1:solidFill>
-                  <ns1:schemeClr val="tx1">
-                    <ns1:lumMod val="75000"/>
-                    <ns1:lumOff val="25000"/>
-                  </ns1:schemeClr>
-                </ns1:solidFill>
-                <ns1:latin typeface="Pretendard" panose="02000503000000020004" pitchFamily="2" charset="-127"/>
-                <ns1:ea typeface="Pretendard" panose="02000503000000020004" pitchFamily="2" charset="-127"/>
-                <ns1:cs typeface="Pretendard" panose="02000503000000020004" pitchFamily="2" charset="-127"/>
-              </ns1:rPr>
-              <ns1:t/>
-            </ns1:r>
-            <ns1:r>
-              <ns1:rPr lang="en-US" altLang="ko-KR" sz="1200" dirty="0" err="1" smtClean="0">
-                <ns1:solidFill>
-                  <ns1:schemeClr val="tx1">
-                    <ns1:lumMod val="75000"/>
-                    <ns1:lumOff val="25000"/>
-                  </ns1:schemeClr>
-                </ns1:solidFill>
-                <ns1:latin typeface="Pretendard" panose="02000503000000020004" pitchFamily="2" charset="-127"/>
-                <ns1:ea typeface="Pretendard" panose="02000503000000020004" pitchFamily="2" charset="-127"/>
-                <ns1:cs typeface="Pretendard" panose="02000503000000020004" pitchFamily="2" charset="-127"/>
-              </ns1:rPr>
-              <ns1:t/>
-            </ns1:r>
-            <ns1:r>
-              <ns1:rPr lang="en-US" altLang="ko-KR" sz="1200" dirty="0">
-                <ns1:solidFill>
-                  <ns1:schemeClr val="tx1">
-                    <ns1:lumMod val="75000"/>
-                    <ns1:lumOff val="25000"/>
-                  </ns1:schemeClr>
-                </ns1:solidFill>
-                <ns1:latin typeface="Pretendard" panose="02000503000000020004" pitchFamily="2" charset="-127"/>
-                <ns1:ea typeface="Pretendard" panose="02000503000000020004" pitchFamily="2" charset="-127"/>
-                <ns1:cs typeface="Pretendard" panose="02000503000000020004" pitchFamily="2" charset="-127"/>
-              </ns1:rPr>
-              <ns1:t/>
-            </ns1:r>
-            <ns1:r>
-              <ns1:rPr lang="en-US" altLang="ko-KR" sz="1200" dirty="0" err="1" smtClean="0">
-                <ns1:solidFill>
-                  <ns1:schemeClr val="tx1">
-                    <ns1:lumMod val="75000"/>
-                    <ns1:lumOff val="25000"/>
-                  </ns1:schemeClr>
-                </ns1:solidFill>
-                <ns1:latin typeface="Pretendard" panose="02000503000000020004" pitchFamily="2" charset="-127"/>
-                <ns1:ea typeface="Pretendard" panose="02000503000000020004" pitchFamily="2" charset="-127"/>
-                <ns1:cs typeface="Pretendard" panose="02000503000000020004" pitchFamily="2" charset="-127"/>
-              </ns1:rPr>
-              <ns1:t/>
-            </ns1:r>
-            <ns1:r>
-              <ns1:rPr lang="en-US" altLang="ko-KR" sz="1200" dirty="0" smtClean="0">
-                <ns1:solidFill>
-                  <ns1:schemeClr val="tx1">
-                    <ns1:lumMod val="75000"/>
-                    <ns1:lumOff val="25000"/>
-                  </ns1:schemeClr>
-                </ns1:solidFill>
-                <ns1:latin typeface="Pretendard" panose="02000503000000020004" pitchFamily="2" charset="-127"/>
-                <ns1:ea typeface="Pretendard" panose="02000503000000020004" pitchFamily="2" charset="-127"/>
-                <ns1:cs typeface="Pretendard" panose="02000503000000020004" pitchFamily="2" charset="-127"/>
-              </ns1:rPr>
-              <ns1:t/>
-            </ns1:r>
-            <ns1:r>
-              <ns1:rPr lang="en-US" altLang="ko-KR" sz="1200" dirty="0" err="1">
-                <ns1:solidFill>
-                  <ns1:schemeClr val="tx1">
-                    <ns1:lumMod val="75000"/>
-                    <ns1:lumOff val="25000"/>
-                  </ns1:schemeClr>
-                </ns1:solidFill>
-                <ns1:latin typeface="Pretendard" panose="02000503000000020004" pitchFamily="2" charset="-127"/>
-                <ns1:ea typeface="Pretendard" panose="02000503000000020004" pitchFamily="2" charset="-127"/>
-                <ns1:cs typeface="Pretendard" panose="02000503000000020004" pitchFamily="2" charset="-127"/>
-              </ns1:rPr>
-              <ns1:t/>
-            </ns1:r>
-            <ns1:r>
-              <ns1:rPr lang="en-US" altLang="ko-KR" sz="1200" dirty="0">
-                <ns1:solidFill>
-                  <ns1:schemeClr val="tx1">
-                    <ns1:lumMod val="75000"/>
-                    <ns1:lumOff val="25000"/>
-                  </ns1:schemeClr>
-                </ns1:solidFill>
-                <ns1:latin typeface="Pretendard" panose="02000503000000020004" pitchFamily="2" charset="-127"/>
-                <ns1:ea typeface="Pretendard" panose="02000503000000020004" pitchFamily="2" charset="-127"/>
-                <ns1:cs typeface="Pretendard" panose="02000503000000020004" pitchFamily="2" charset="-127"/>
-              </ns1:rPr>
-              <ns1:t/>
-            </ns1:r>
-            <ns1:r>
-              <ns1:rPr lang="en-US" altLang="ko-KR" sz="1200" dirty="0" err="1" smtClean="0">
-                <ns1:solidFill>
-                  <ns1:schemeClr val="tx1">
-                    <ns1:lumMod val="75000"/>
-                    <ns1:lumOff val="25000"/>
-                  </ns1:schemeClr>
-                </ns1:solidFill>
-                <ns1:latin typeface="Pretendard" panose="02000503000000020004" pitchFamily="2" charset="-127"/>
-                <ns1:ea typeface="Pretendard" panose="02000503000000020004" pitchFamily="2" charset="-127"/>
-                <ns1:cs typeface="Pretendard" panose="02000503000000020004" pitchFamily="2" charset="-127"/>
-              </ns1:rPr>
-              <ns1:t/>
-            </ns1:r>
             <ns1:endParaRPr lang="en-US" altLang="ko-KR" sz="1200" dirty="0" smtClean="0">
               <ns1:solidFill>
                 <ns1:schemeClr val="tx1">
@@ -16880,188 +15970,6 @@
                 <ns1:spcPct val="150000"/>
               </ns1:lnSpc>
             </ns1:pPr>
-            <ns1:r>
-              <ns1:rPr lang="en-US" altLang="ko-KR" sz="1200" dirty="0" err="1">
-                <ns1:solidFill>
-                  <ns1:schemeClr val="tx1">
-                    <ns1:lumMod val="75000"/>
-                    <ns1:lumOff val="25000"/>
-                  </ns1:schemeClr>
-                </ns1:solidFill>
-                <ns1:latin typeface="Pretendard" panose="02000503000000020004" pitchFamily="2" charset="-127"/>
-                <ns1:ea typeface="Pretendard" panose="02000503000000020004" pitchFamily="2" charset="-127"/>
-                <ns1:cs typeface="Pretendard" panose="02000503000000020004" pitchFamily="2" charset="-127"/>
-              </ns1:rPr>
-              <ns1:t/>
-            </ns1:r>
-            <ns1:r>
-              <ns1:rPr lang="en-US" altLang="ko-KR" sz="1200" dirty="0">
-                <ns1:solidFill>
-                  <ns1:schemeClr val="tx1">
-                    <ns1:lumMod val="75000"/>
-                    <ns1:lumOff val="25000"/>
-                  </ns1:schemeClr>
-                </ns1:solidFill>
-                <ns1:latin typeface="Pretendard" panose="02000503000000020004" pitchFamily="2" charset="-127"/>
-                <ns1:ea typeface="Pretendard" panose="02000503000000020004" pitchFamily="2" charset="-127"/>
-                <ns1:cs typeface="Pretendard" panose="02000503000000020004" pitchFamily="2" charset="-127"/>
-              </ns1:rPr>
-              <ns1:t/>
-            </ns1:r>
-            <ns1:r>
-              <ns1:rPr lang="en-US" altLang="ko-KR" sz="1200" dirty="0" err="1">
-                <ns1:solidFill>
-                  <ns1:schemeClr val="tx1">
-                    <ns1:lumMod val="75000"/>
-                    <ns1:lumOff val="25000"/>
-                  </ns1:schemeClr>
-                </ns1:solidFill>
-                <ns1:latin typeface="Pretendard" panose="02000503000000020004" pitchFamily="2" charset="-127"/>
-                <ns1:ea typeface="Pretendard" panose="02000503000000020004" pitchFamily="2" charset="-127"/>
-                <ns1:cs typeface="Pretendard" panose="02000503000000020004" pitchFamily="2" charset="-127"/>
-              </ns1:rPr>
-              <ns1:t/>
-            </ns1:r>
-            <ns1:r>
-              <ns1:rPr lang="en-US" altLang="ko-KR" sz="1200" dirty="0">
-                <ns1:solidFill>
-                  <ns1:schemeClr val="tx1">
-                    <ns1:lumMod val="75000"/>
-                    <ns1:lumOff val="25000"/>
-                  </ns1:schemeClr>
-                </ns1:solidFill>
-                <ns1:latin typeface="Pretendard" panose="02000503000000020004" pitchFamily="2" charset="-127"/>
-                <ns1:ea typeface="Pretendard" panose="02000503000000020004" pitchFamily="2" charset="-127"/>
-                <ns1:cs typeface="Pretendard" panose="02000503000000020004" pitchFamily="2" charset="-127"/>
-              </ns1:rPr>
-              <ns1:t/>
-            </ns1:r>
-            <ns1:r>
-              <ns1:rPr lang="en-US" altLang="ko-KR" sz="1200" dirty="0" err="1">
-                <ns1:solidFill>
-                  <ns1:schemeClr val="tx1">
-                    <ns1:lumMod val="75000"/>
-                    <ns1:lumOff val="25000"/>
-                  </ns1:schemeClr>
-                </ns1:solidFill>
-                <ns1:latin typeface="Pretendard" panose="02000503000000020004" pitchFamily="2" charset="-127"/>
-                <ns1:ea typeface="Pretendard" panose="02000503000000020004" pitchFamily="2" charset="-127"/>
-                <ns1:cs typeface="Pretendard" panose="02000503000000020004" pitchFamily="2" charset="-127"/>
-              </ns1:rPr>
-              <ns1:t/>
-            </ns1:r>
-            <ns1:r>
-              <ns1:rPr lang="en-US" altLang="ko-KR" sz="1200" dirty="0">
-                <ns1:solidFill>
-                  <ns1:schemeClr val="tx1">
-                    <ns1:lumMod val="75000"/>
-                    <ns1:lumOff val="25000"/>
-                  </ns1:schemeClr>
-                </ns1:solidFill>
-                <ns1:latin typeface="Pretendard" panose="02000503000000020004" pitchFamily="2" charset="-127"/>
-                <ns1:ea typeface="Pretendard" panose="02000503000000020004" pitchFamily="2" charset="-127"/>
-                <ns1:cs typeface="Pretendard" panose="02000503000000020004" pitchFamily="2" charset="-127"/>
-              </ns1:rPr>
-              <ns1:t/>
-            </ns1:r>
-            <ns1:r>
-              <ns1:rPr lang="en-US" altLang="ko-KR" sz="1200" dirty="0" err="1">
-                <ns1:solidFill>
-                  <ns1:schemeClr val="tx1">
-                    <ns1:lumMod val="75000"/>
-                    <ns1:lumOff val="25000"/>
-                  </ns1:schemeClr>
-                </ns1:solidFill>
-                <ns1:latin typeface="Pretendard" panose="02000503000000020004" pitchFamily="2" charset="-127"/>
-                <ns1:ea typeface="Pretendard" panose="02000503000000020004" pitchFamily="2" charset="-127"/>
-                <ns1:cs typeface="Pretendard" panose="02000503000000020004" pitchFamily="2" charset="-127"/>
-              </ns1:rPr>
-              <ns1:t/>
-            </ns1:r>
-            <ns1:r>
-              <ns1:rPr lang="en-US" altLang="ko-KR" sz="1200" dirty="0">
-                <ns1:solidFill>
-                  <ns1:schemeClr val="tx1">
-                    <ns1:lumMod val="75000"/>
-                    <ns1:lumOff val="25000"/>
-                  </ns1:schemeClr>
-                </ns1:solidFill>
-                <ns1:latin typeface="Pretendard" panose="02000503000000020004" pitchFamily="2" charset="-127"/>
-                <ns1:ea typeface="Pretendard" panose="02000503000000020004" pitchFamily="2" charset="-127"/>
-                <ns1:cs typeface="Pretendard" panose="02000503000000020004" pitchFamily="2" charset="-127"/>
-              </ns1:rPr>
-              <ns1:t/>
-            </ns1:r>
-            <ns1:r>
-              <ns1:rPr lang="en-US" altLang="ko-KR" sz="1200" dirty="0" err="1">
-                <ns1:solidFill>
-                  <ns1:schemeClr val="tx1">
-                    <ns1:lumMod val="75000"/>
-                    <ns1:lumOff val="25000"/>
-                  </ns1:schemeClr>
-                </ns1:solidFill>
-                <ns1:latin typeface="Pretendard" panose="02000503000000020004" pitchFamily="2" charset="-127"/>
-                <ns1:ea typeface="Pretendard" panose="02000503000000020004" pitchFamily="2" charset="-127"/>
-                <ns1:cs typeface="Pretendard" panose="02000503000000020004" pitchFamily="2" charset="-127"/>
-              </ns1:rPr>
-              <ns1:t/>
-            </ns1:r>
-            <ns1:r>
-              <ns1:rPr lang="en-US" altLang="ko-KR" sz="1200" dirty="0">
-                <ns1:solidFill>
-                  <ns1:schemeClr val="tx1">
-                    <ns1:lumMod val="75000"/>
-                    <ns1:lumOff val="25000"/>
-                  </ns1:schemeClr>
-                </ns1:solidFill>
-                <ns1:latin typeface="Pretendard" panose="02000503000000020004" pitchFamily="2" charset="-127"/>
-                <ns1:ea typeface="Pretendard" panose="02000503000000020004" pitchFamily="2" charset="-127"/>
-                <ns1:cs typeface="Pretendard" panose="02000503000000020004" pitchFamily="2" charset="-127"/>
-              </ns1:rPr>
-              <ns1:t/>
-            </ns1:r>
-            <ns1:r>
-              <ns1:rPr lang="en-US" altLang="ko-KR" sz="1200" dirty="0" err="1">
-                <ns1:solidFill>
-                  <ns1:schemeClr val="tx1">
-                    <ns1:lumMod val="75000"/>
-                    <ns1:lumOff val="25000"/>
-                  </ns1:schemeClr>
-                </ns1:solidFill>
-                <ns1:latin typeface="Pretendard" panose="02000503000000020004" pitchFamily="2" charset="-127"/>
-                <ns1:ea typeface="Pretendard" panose="02000503000000020004" pitchFamily="2" charset="-127"/>
-                <ns1:cs typeface="Pretendard" panose="02000503000000020004" pitchFamily="2" charset="-127"/>
-              </ns1:rPr>
-              <ns1:t/>
-            </ns1:r>
-            <ns1:r>
-              <ns1:rPr lang="en-US" altLang="ko-KR" sz="1200" dirty="0">
-                <ns1:solidFill>
-                  <ns1:schemeClr val="tx1">
-                    <ns1:lumMod val="75000"/>
-                    <ns1:lumOff val="25000"/>
-                  </ns1:schemeClr>
-                </ns1:solidFill>
-                <ns1:latin typeface="Pretendard" panose="02000503000000020004" pitchFamily="2" charset="-127"/>
-                <ns1:ea typeface="Pretendard" panose="02000503000000020004" pitchFamily="2" charset="-127"/>
-                <ns1:cs typeface="Pretendard" panose="02000503000000020004" pitchFamily="2" charset="-127"/>
-              </ns1:rPr>
-              <ns1:t/>
-            </ns1:r>
-            <ns1:r>
-              <ns1:rPr lang="en-US" altLang="ko-KR" sz="1200" dirty="0" err="1">
-                <ns1:solidFill>
-                  <ns1:schemeClr val="tx1">
-                    <ns1:lumMod val="75000"/>
-                    <ns1:lumOff val="25000"/>
-                  </ns1:schemeClr>
-                </ns1:solidFill>
-                <ns1:latin typeface="Pretendard" panose="02000503000000020004" pitchFamily="2" charset="-127"/>
-                <ns1:ea typeface="Pretendard" panose="02000503000000020004" pitchFamily="2" charset="-127"/>
-                <ns1:cs typeface="Pretendard" panose="02000503000000020004" pitchFamily="2" charset="-127"/>
-              </ns1:rPr>
-              <ns1:t/>
-            </ns1:r>
             <ns1:endParaRPr lang="en-US" altLang="ko-KR" sz="1200" dirty="0">
               <ns1:solidFill>
                 <ns1:schemeClr val="tx1">
@@ -17141,20 +16049,6 @@
                 <ns1:spcPct val="150000"/>
               </ns1:lnSpc>
             </ns1:pPr>
-            <ns1:r>
-              <ns1:rPr lang="ko-KR" altLang="ko-KR" sz="1200" dirty="0" smtClean="0">
-                <ns1:solidFill>
-                  <ns1:schemeClr val="tx1">
-                    <ns1:lumMod val="75000"/>
-                    <ns1:lumOff val="25000"/>
-                  </ns1:schemeClr>
-                </ns1:solidFill>
-                <ns1:latin typeface="Pretendard" panose="02000503000000020004" pitchFamily="2" charset="-127"/>
-                <ns1:ea typeface="Pretendard" panose="02000503000000020004" pitchFamily="2" charset="-127"/>
-                <ns1:cs typeface="Pretendard" panose="02000503000000020004" pitchFamily="2" charset="-127"/>
-              </ns1:rPr>
-              <ns1:t>ImageNet→LLM 패러다임 전환 선도.</ns1:t>
-            </ns1:r>
             <ns1:endParaRPr lang="en-US" altLang="ko-KR" sz="1200" dirty="0">
               <ns1:solidFill>
                 <ns1:schemeClr val="tx1">
@@ -17173,188 +16067,6 @@
                 <ns1:spcPct val="150000"/>
               </ns1:lnSpc>
             </ns1:pPr>
-            <ns1:r>
-              <ns1:rPr lang="en-US" altLang="ko-KR" sz="1200" dirty="0" err="1" smtClean="0">
-                <ns1:solidFill>
-                  <ns1:schemeClr val="tx1">
-                    <ns1:lumMod val="75000"/>
-                    <ns1:lumOff val="25000"/>
-                  </ns1:schemeClr>
-                </ns1:solidFill>
-                <ns1:latin typeface="Pretendard" panose="02000503000000020004" pitchFamily="2" charset="-127"/>
-                <ns1:ea typeface="Pretendard" panose="02000503000000020004" pitchFamily="2" charset="-127"/>
-                <ns1:cs typeface="Pretendard" panose="02000503000000020004" pitchFamily="2" charset="-127"/>
-              </ns1:rPr>
-              <ns1:t/>
-            </ns1:r>
-            <ns1:r>
-              <ns1:rPr lang="en-US" altLang="ko-KR" sz="1200" dirty="0">
-                <ns1:solidFill>
-                  <ns1:schemeClr val="tx1">
-                    <ns1:lumMod val="75000"/>
-                    <ns1:lumOff val="25000"/>
-                  </ns1:schemeClr>
-                </ns1:solidFill>
-                <ns1:latin typeface="Pretendard" panose="02000503000000020004" pitchFamily="2" charset="-127"/>
-                <ns1:ea typeface="Pretendard" panose="02000503000000020004" pitchFamily="2" charset="-127"/>
-                <ns1:cs typeface="Pretendard" panose="02000503000000020004" pitchFamily="2" charset="-127"/>
-              </ns1:rPr>
-              <ns1:t/>
-            </ns1:r>
-            <ns1:r>
-              <ns1:rPr lang="en-US" altLang="ko-KR" sz="1200" dirty="0" err="1">
-                <ns1:solidFill>
-                  <ns1:schemeClr val="tx1">
-                    <ns1:lumMod val="75000"/>
-                    <ns1:lumOff val="25000"/>
-                  </ns1:schemeClr>
-                </ns1:solidFill>
-                <ns1:latin typeface="Pretendard" panose="02000503000000020004" pitchFamily="2" charset="-127"/>
-                <ns1:ea typeface="Pretendard" panose="02000503000000020004" pitchFamily="2" charset="-127"/>
-                <ns1:cs typeface="Pretendard" panose="02000503000000020004" pitchFamily="2" charset="-127"/>
-              </ns1:rPr>
-              <ns1:t/>
-            </ns1:r>
-            <ns1:r>
-              <ns1:rPr lang="en-US" altLang="ko-KR" sz="1200" dirty="0">
-                <ns1:solidFill>
-                  <ns1:schemeClr val="tx1">
-                    <ns1:lumMod val="75000"/>
-                    <ns1:lumOff val="25000"/>
-                  </ns1:schemeClr>
-                </ns1:solidFill>
-                <ns1:latin typeface="Pretendard" panose="02000503000000020004" pitchFamily="2" charset="-127"/>
-                <ns1:ea typeface="Pretendard" panose="02000503000000020004" pitchFamily="2" charset="-127"/>
-                <ns1:cs typeface="Pretendard" panose="02000503000000020004" pitchFamily="2" charset="-127"/>
-              </ns1:rPr>
-              <ns1:t/>
-            </ns1:r>
-            <ns1:r>
-              <ns1:rPr lang="en-US" altLang="ko-KR" sz="1200" dirty="0" err="1">
-                <ns1:solidFill>
-                  <ns1:schemeClr val="tx1">
-                    <ns1:lumMod val="75000"/>
-                    <ns1:lumOff val="25000"/>
-                  </ns1:schemeClr>
-                </ns1:solidFill>
-                <ns1:latin typeface="Pretendard" panose="02000503000000020004" pitchFamily="2" charset="-127"/>
-                <ns1:ea typeface="Pretendard" panose="02000503000000020004" pitchFamily="2" charset="-127"/>
-                <ns1:cs typeface="Pretendard" panose="02000503000000020004" pitchFamily="2" charset="-127"/>
-              </ns1:rPr>
-              <ns1:t/>
-            </ns1:r>
-            <ns1:r>
-              <ns1:rPr lang="en-US" altLang="ko-KR" sz="1200" dirty="0">
-                <ns1:solidFill>
-                  <ns1:schemeClr val="tx1">
-                    <ns1:lumMod val="75000"/>
-                    <ns1:lumOff val="25000"/>
-                  </ns1:schemeClr>
-                </ns1:solidFill>
-                <ns1:latin typeface="Pretendard" panose="02000503000000020004" pitchFamily="2" charset="-127"/>
-                <ns1:ea typeface="Pretendard" panose="02000503000000020004" pitchFamily="2" charset="-127"/>
-                <ns1:cs typeface="Pretendard" panose="02000503000000020004" pitchFamily="2" charset="-127"/>
-              </ns1:rPr>
-              <ns1:t/>
-            </ns1:r>
-            <ns1:r>
-              <ns1:rPr lang="en-US" altLang="ko-KR" sz="1200" dirty="0" err="1" smtClean="0">
-                <ns1:solidFill>
-                  <ns1:schemeClr val="tx1">
-                    <ns1:lumMod val="75000"/>
-                    <ns1:lumOff val="25000"/>
-                  </ns1:schemeClr>
-                </ns1:solidFill>
-                <ns1:latin typeface="Pretendard" panose="02000503000000020004" pitchFamily="2" charset="-127"/>
-                <ns1:ea typeface="Pretendard" panose="02000503000000020004" pitchFamily="2" charset="-127"/>
-                <ns1:cs typeface="Pretendard" panose="02000503000000020004" pitchFamily="2" charset="-127"/>
-              </ns1:rPr>
-              <ns1:t/>
-            </ns1:r>
-            <ns1:r>
-              <ns1:rPr lang="en-US" altLang="ko-KR" sz="1200" dirty="0">
-                <ns1:solidFill>
-                  <ns1:schemeClr val="tx1">
-                    <ns1:lumMod val="75000"/>
-                    <ns1:lumOff val="25000"/>
-                  </ns1:schemeClr>
-                </ns1:solidFill>
-                <ns1:latin typeface="Pretendard" panose="02000503000000020004" pitchFamily="2" charset="-127"/>
-                <ns1:ea typeface="Pretendard" panose="02000503000000020004" pitchFamily="2" charset="-127"/>
-                <ns1:cs typeface="Pretendard" panose="02000503000000020004" pitchFamily="2" charset="-127"/>
-              </ns1:rPr>
-              <ns1:t/>
-            </ns1:r>
-            <ns1:r>
-              <ns1:rPr lang="en-US" altLang="ko-KR" sz="1200" dirty="0" err="1" smtClean="0">
-                <ns1:solidFill>
-                  <ns1:schemeClr val="tx1">
-                    <ns1:lumMod val="75000"/>
-                    <ns1:lumOff val="25000"/>
-                  </ns1:schemeClr>
-                </ns1:solidFill>
-                <ns1:latin typeface="Pretendard" panose="02000503000000020004" pitchFamily="2" charset="-127"/>
-                <ns1:ea typeface="Pretendard" panose="02000503000000020004" pitchFamily="2" charset="-127"/>
-                <ns1:cs typeface="Pretendard" panose="02000503000000020004" pitchFamily="2" charset="-127"/>
-              </ns1:rPr>
-              <ns1:t/>
-            </ns1:r>
-            <ns1:r>
-              <ns1:rPr lang="en-US" altLang="ko-KR" sz="1200" dirty="0" smtClean="0">
-                <ns1:solidFill>
-                  <ns1:schemeClr val="tx1">
-                    <ns1:lumMod val="75000"/>
-                    <ns1:lumOff val="25000"/>
-                  </ns1:schemeClr>
-                </ns1:solidFill>
-                <ns1:latin typeface="Pretendard" panose="02000503000000020004" pitchFamily="2" charset="-127"/>
-                <ns1:ea typeface="Pretendard" panose="02000503000000020004" pitchFamily="2" charset="-127"/>
-                <ns1:cs typeface="Pretendard" panose="02000503000000020004" pitchFamily="2" charset="-127"/>
-              </ns1:rPr>
-              <ns1:t/>
-            </ns1:r>
-            <ns1:r>
-              <ns1:rPr lang="en-US" altLang="ko-KR" sz="1200" dirty="0" err="1">
-                <ns1:solidFill>
-                  <ns1:schemeClr val="tx1">
-                    <ns1:lumMod val="75000"/>
-                    <ns1:lumOff val="25000"/>
-                  </ns1:schemeClr>
-                </ns1:solidFill>
-                <ns1:latin typeface="Pretendard" panose="02000503000000020004" pitchFamily="2" charset="-127"/>
-                <ns1:ea typeface="Pretendard" panose="02000503000000020004" pitchFamily="2" charset="-127"/>
-                <ns1:cs typeface="Pretendard" panose="02000503000000020004" pitchFamily="2" charset="-127"/>
-              </ns1:rPr>
-              <ns1:t/>
-            </ns1:r>
-            <ns1:r>
-              <ns1:rPr lang="en-US" altLang="ko-KR" sz="1200" dirty="0">
-                <ns1:solidFill>
-                  <ns1:schemeClr val="tx1">
-                    <ns1:lumMod val="75000"/>
-                    <ns1:lumOff val="25000"/>
-                  </ns1:schemeClr>
-                </ns1:solidFill>
-                <ns1:latin typeface="Pretendard" panose="02000503000000020004" pitchFamily="2" charset="-127"/>
-                <ns1:ea typeface="Pretendard" panose="02000503000000020004" pitchFamily="2" charset="-127"/>
-                <ns1:cs typeface="Pretendard" panose="02000503000000020004" pitchFamily="2" charset="-127"/>
-              </ns1:rPr>
-              <ns1:t/>
-            </ns1:r>
-            <ns1:r>
-              <ns1:rPr lang="en-US" altLang="ko-KR" sz="1200" dirty="0" err="1" smtClean="0">
-                <ns1:solidFill>
-                  <ns1:schemeClr val="tx1">
-                    <ns1:lumMod val="75000"/>
-                    <ns1:lumOff val="25000"/>
-                  </ns1:schemeClr>
-                </ns1:solidFill>
-                <ns1:latin typeface="Pretendard" panose="02000503000000020004" pitchFamily="2" charset="-127"/>
-                <ns1:ea typeface="Pretendard" panose="02000503000000020004" pitchFamily="2" charset="-127"/>
-                <ns1:cs typeface="Pretendard" panose="02000503000000020004" pitchFamily="2" charset="-127"/>
-              </ns1:rPr>
-              <ns1:t/>
-            </ns1:r>
             <ns1:endParaRPr lang="en-US" altLang="ko-KR" sz="1200" dirty="0" smtClean="0">
               <ns1:solidFill>
                 <ns1:schemeClr val="tx1">
@@ -17373,188 +16085,6 @@
                 <ns1:spcPct val="150000"/>
               </ns1:lnSpc>
             </ns1:pPr>
-            <ns1:r>
-              <ns1:rPr lang="en-US" altLang="ko-KR" sz="1200" dirty="0" err="1">
-                <ns1:solidFill>
-                  <ns1:schemeClr val="tx1">
-                    <ns1:lumMod val="75000"/>
-                    <ns1:lumOff val="25000"/>
-                  </ns1:schemeClr>
-                </ns1:solidFill>
-                <ns1:latin typeface="Pretendard" panose="02000503000000020004" pitchFamily="2" charset="-127"/>
-                <ns1:ea typeface="Pretendard" panose="02000503000000020004" pitchFamily="2" charset="-127"/>
-                <ns1:cs typeface="Pretendard" panose="02000503000000020004" pitchFamily="2" charset="-127"/>
-              </ns1:rPr>
-              <ns1:t/>
-            </ns1:r>
-            <ns1:r>
-              <ns1:rPr lang="en-US" altLang="ko-KR" sz="1200" dirty="0">
-                <ns1:solidFill>
-                  <ns1:schemeClr val="tx1">
-                    <ns1:lumMod val="75000"/>
-                    <ns1:lumOff val="25000"/>
-                  </ns1:schemeClr>
-                </ns1:solidFill>
-                <ns1:latin typeface="Pretendard" panose="02000503000000020004" pitchFamily="2" charset="-127"/>
-                <ns1:ea typeface="Pretendard" panose="02000503000000020004" pitchFamily="2" charset="-127"/>
-                <ns1:cs typeface="Pretendard" panose="02000503000000020004" pitchFamily="2" charset="-127"/>
-              </ns1:rPr>
-              <ns1:t/>
-            </ns1:r>
-            <ns1:r>
-              <ns1:rPr lang="en-US" altLang="ko-KR" sz="1200" dirty="0" err="1">
-                <ns1:solidFill>
-                  <ns1:schemeClr val="tx1">
-                    <ns1:lumMod val="75000"/>
-                    <ns1:lumOff val="25000"/>
-                  </ns1:schemeClr>
-                </ns1:solidFill>
-                <ns1:latin typeface="Pretendard" panose="02000503000000020004" pitchFamily="2" charset="-127"/>
-                <ns1:ea typeface="Pretendard" panose="02000503000000020004" pitchFamily="2" charset="-127"/>
-                <ns1:cs typeface="Pretendard" panose="02000503000000020004" pitchFamily="2" charset="-127"/>
-              </ns1:rPr>
-              <ns1:t/>
-            </ns1:r>
-            <ns1:r>
-              <ns1:rPr lang="en-US" altLang="ko-KR" sz="1200" dirty="0">
-                <ns1:solidFill>
-                  <ns1:schemeClr val="tx1">
-                    <ns1:lumMod val="75000"/>
-                    <ns1:lumOff val="25000"/>
-                  </ns1:schemeClr>
-                </ns1:solidFill>
-                <ns1:latin typeface="Pretendard" panose="02000503000000020004" pitchFamily="2" charset="-127"/>
-                <ns1:ea typeface="Pretendard" panose="02000503000000020004" pitchFamily="2" charset="-127"/>
-                <ns1:cs typeface="Pretendard" panose="02000503000000020004" pitchFamily="2" charset="-127"/>
-              </ns1:rPr>
-              <ns1:t/>
-            </ns1:r>
-            <ns1:r>
-              <ns1:rPr lang="en-US" altLang="ko-KR" sz="1200" dirty="0" err="1">
-                <ns1:solidFill>
-                  <ns1:schemeClr val="tx1">
-                    <ns1:lumMod val="75000"/>
-                    <ns1:lumOff val="25000"/>
-                  </ns1:schemeClr>
-                </ns1:solidFill>
-                <ns1:latin typeface="Pretendard" panose="02000503000000020004" pitchFamily="2" charset="-127"/>
-                <ns1:ea typeface="Pretendard" panose="02000503000000020004" pitchFamily="2" charset="-127"/>
-                <ns1:cs typeface="Pretendard" panose="02000503000000020004" pitchFamily="2" charset="-127"/>
-              </ns1:rPr>
-              <ns1:t/>
-            </ns1:r>
-            <ns1:r>
-              <ns1:rPr lang="en-US" altLang="ko-KR" sz="1200" dirty="0">
-                <ns1:solidFill>
-                  <ns1:schemeClr val="tx1">
-                    <ns1:lumMod val="75000"/>
-                    <ns1:lumOff val="25000"/>
-                  </ns1:schemeClr>
-                </ns1:solidFill>
-                <ns1:latin typeface="Pretendard" panose="02000503000000020004" pitchFamily="2" charset="-127"/>
-                <ns1:ea typeface="Pretendard" panose="02000503000000020004" pitchFamily="2" charset="-127"/>
-                <ns1:cs typeface="Pretendard" panose="02000503000000020004" pitchFamily="2" charset="-127"/>
-              </ns1:rPr>
-              <ns1:t/>
-            </ns1:r>
-            <ns1:r>
-              <ns1:rPr lang="en-US" altLang="ko-KR" sz="1200" dirty="0" err="1">
-                <ns1:solidFill>
-                  <ns1:schemeClr val="tx1">
-                    <ns1:lumMod val="75000"/>
-                    <ns1:lumOff val="25000"/>
-                  </ns1:schemeClr>
-                </ns1:solidFill>
-                <ns1:latin typeface="Pretendard" panose="02000503000000020004" pitchFamily="2" charset="-127"/>
-                <ns1:ea typeface="Pretendard" panose="02000503000000020004" pitchFamily="2" charset="-127"/>
-                <ns1:cs typeface="Pretendard" panose="02000503000000020004" pitchFamily="2" charset="-127"/>
-              </ns1:rPr>
-              <ns1:t/>
-            </ns1:r>
-            <ns1:r>
-              <ns1:rPr lang="en-US" altLang="ko-KR" sz="1200" dirty="0">
-                <ns1:solidFill>
-                  <ns1:schemeClr val="tx1">
-                    <ns1:lumMod val="75000"/>
-                    <ns1:lumOff val="25000"/>
-                  </ns1:schemeClr>
-                </ns1:solidFill>
-                <ns1:latin typeface="Pretendard" panose="02000503000000020004" pitchFamily="2" charset="-127"/>
-                <ns1:ea typeface="Pretendard" panose="02000503000000020004" pitchFamily="2" charset="-127"/>
-                <ns1:cs typeface="Pretendard" panose="02000503000000020004" pitchFamily="2" charset="-127"/>
-              </ns1:rPr>
-              <ns1:t/>
-            </ns1:r>
-            <ns1:r>
-              <ns1:rPr lang="en-US" altLang="ko-KR" sz="1200" dirty="0" err="1">
-                <ns1:solidFill>
-                  <ns1:schemeClr val="tx1">
-                    <ns1:lumMod val="75000"/>
-                    <ns1:lumOff val="25000"/>
-                  </ns1:schemeClr>
-                </ns1:solidFill>
-                <ns1:latin typeface="Pretendard" panose="02000503000000020004" pitchFamily="2" charset="-127"/>
-                <ns1:ea typeface="Pretendard" panose="02000503000000020004" pitchFamily="2" charset="-127"/>
-                <ns1:cs typeface="Pretendard" panose="02000503000000020004" pitchFamily="2" charset="-127"/>
-              </ns1:rPr>
-              <ns1:t/>
-            </ns1:r>
-            <ns1:r>
-              <ns1:rPr lang="en-US" altLang="ko-KR" sz="1200" dirty="0">
-                <ns1:solidFill>
-                  <ns1:schemeClr val="tx1">
-                    <ns1:lumMod val="75000"/>
-                    <ns1:lumOff val="25000"/>
-                  </ns1:schemeClr>
-                </ns1:solidFill>
-                <ns1:latin typeface="Pretendard" panose="02000503000000020004" pitchFamily="2" charset="-127"/>
-                <ns1:ea typeface="Pretendard" panose="02000503000000020004" pitchFamily="2" charset="-127"/>
-                <ns1:cs typeface="Pretendard" panose="02000503000000020004" pitchFamily="2" charset="-127"/>
-              </ns1:rPr>
-              <ns1:t/>
-            </ns1:r>
-            <ns1:r>
-              <ns1:rPr lang="en-US" altLang="ko-KR" sz="1200" dirty="0" err="1">
-                <ns1:solidFill>
-                  <ns1:schemeClr val="tx1">
-                    <ns1:lumMod val="75000"/>
-                    <ns1:lumOff val="25000"/>
-                  </ns1:schemeClr>
-                </ns1:solidFill>
-                <ns1:latin typeface="Pretendard" panose="02000503000000020004" pitchFamily="2" charset="-127"/>
-                <ns1:ea typeface="Pretendard" panose="02000503000000020004" pitchFamily="2" charset="-127"/>
-                <ns1:cs typeface="Pretendard" panose="02000503000000020004" pitchFamily="2" charset="-127"/>
-              </ns1:rPr>
-              <ns1:t/>
-            </ns1:r>
-            <ns1:r>
-              <ns1:rPr lang="en-US" altLang="ko-KR" sz="1200" dirty="0">
-                <ns1:solidFill>
-                  <ns1:schemeClr val="tx1">
-                    <ns1:lumMod val="75000"/>
-                    <ns1:lumOff val="25000"/>
-                  </ns1:schemeClr>
-                </ns1:solidFill>
-                <ns1:latin typeface="Pretendard" panose="02000503000000020004" pitchFamily="2" charset="-127"/>
-                <ns1:ea typeface="Pretendard" panose="02000503000000020004" pitchFamily="2" charset="-127"/>
-                <ns1:cs typeface="Pretendard" panose="02000503000000020004" pitchFamily="2" charset="-127"/>
-              </ns1:rPr>
-              <ns1:t/>
-            </ns1:r>
-            <ns1:r>
-              <ns1:rPr lang="en-US" altLang="ko-KR" sz="1200" dirty="0" err="1">
-                <ns1:solidFill>
-                  <ns1:schemeClr val="tx1">
-                    <ns1:lumMod val="75000"/>
-                    <ns1:lumOff val="25000"/>
-                  </ns1:schemeClr>
-                </ns1:solidFill>
-                <ns1:latin typeface="Pretendard" panose="02000503000000020004" pitchFamily="2" charset="-127"/>
-                <ns1:ea typeface="Pretendard" panose="02000503000000020004" pitchFamily="2" charset="-127"/>
-                <ns1:cs typeface="Pretendard" panose="02000503000000020004" pitchFamily="2" charset="-127"/>
-              </ns1:rPr>
-              <ns1:t/>
-            </ns1:r>
             <ns1:endParaRPr lang="en-US" altLang="ko-KR" sz="1200" dirty="0">
               <ns1:solidFill>
                 <ns1:schemeClr val="tx1">

--- a/result/머신러닝_심층_기술_가이드_재현검증.pptx
+++ b/result/머신러닝_심층_기술_가이드_재현검증.pptx
@@ -3303,11 +3303,6 @@
           <ns1:lstStyle/>
           <ns1:p>
             <ns1:r>
-              <ns1:rPr dirty="0">
-                <ns1:latin typeface="Pretendard"/>
-                <ns1:ea typeface="Pretendard"/>
-                <ns1:cs typeface="Pretendard"/>
-              </ns1:rPr>
               <ns1:t>05 프레임워크 선택</ns1:t>
             </ns1:r>
           </ns1:p>
@@ -3400,7 +3395,7 @@
           <ns1:lstStyle/>
           <ns1:p>
             <ns1:r>
-              <ns1:rPr lang="ko-KR" altLang="en-US" dirty="0" smtClean="0">
+              <ns1:rPr lang="ko-KR" altLang="en-US" sz="1200" dirty="0" smtClean="0">
                 <ns1:solidFill>
                   <ns1:schemeClr val="tx1">
                     <ns1:lumMod val="75000"/>
@@ -5110,11 +5105,6 @@
           <ns1:lstStyle/>
           <ns1:p>
             <ns1:r>
-              <ns1:rPr dirty="0">
-                <ns1:latin typeface="Pretendard"/>
-                <ns1:ea typeface="Pretendard"/>
-                <ns1:cs typeface="Pretendard"/>
-              </ns1:rPr>
               <ns1:t>07 ML Ops</ns1:t>
             </ns1:r>
           </ns1:p>
@@ -5218,7 +5208,7 @@
           <ns1:lstStyle/>
           <ns1:p>
             <ns1:r>
-              <ns1:rPr lang="ko-KR" altLang="en-US" dirty="0" smtClean="0">
+              <ns1:rPr lang="ko-KR" altLang="en-US" sz="1200" dirty="0" smtClean="0">
                 <ns1:solidFill>
                   <ns1:schemeClr val="tx1">
                     <ns1:lumMod val="75000"/>
@@ -8494,11 +8484,6 @@
           <ns1:lstStyle/>
           <ns1:p>
             <ns1:r>
-              <ns1:rPr dirty="0">
-                <ns1:latin typeface="Pretendard"/>
-                <ns1:ea typeface="Pretendard"/>
-                <ns1:cs typeface="Pretendard"/>
-              </ns1:rPr>
               <ns1:t>11 핵심 역량</ns1:t>
             </ns1:r>
           </ns1:p>
@@ -8591,7 +8576,7 @@
           <ns1:lstStyle/>
           <ns1:p>
             <ns1:r>
-              <ns1:rPr lang="ko-KR" altLang="en-US" dirty="0" smtClean="0">
+              <ns1:rPr lang="ko-KR" altLang="en-US" sz="1200" dirty="0" smtClean="0">
                 <ns1:solidFill>
                   <ns1:schemeClr val="tx1">
                     <ns1:lumMod val="75000"/>
@@ -14308,7 +14293,7 @@
           <ns1:lstStyle/>
           <ns1:p>
             <ns1:r>
-              <ns1:rPr lang="ko-KR" dirty="0">
+              <ns1:rPr lang="ko-KR" dirty="0" sz="1200">
                 <ns1:latin typeface="Pretendard"/>
                 <ns1:ea typeface="Pretendard"/>
                 <ns1:cs typeface="Pretendard"/>
@@ -15620,11 +15605,6 @@
           <ns1:lstStyle/>
           <ns1:p>
             <ns1:r>
-              <ns1:rPr dirty="0">
-                <ns1:latin typeface="Pretendard"/>
-                <ns1:ea typeface="Pretendard"/>
-                <ns1:cs typeface="Pretendard"/>
-              </ns1:rPr>
               <ns1:t>10 ML 서비스</ns1:t>
             </ns1:r>
           </ns1:p>
@@ -15920,11 +15900,6 @@
           <ns1:lstStyle/>
           <ns1:p>
             <ns1:r>
-              <ns1:rPr dirty="0">
-                <ns1:latin typeface="Pretendard"/>
-                <ns1:ea typeface="Pretendard"/>
-                <ns1:cs typeface="Pretendard"/>
-              </ns1:rPr>
               <ns1:t>02 아키텍처 진화</ns1:t>
             </ns1:r>
           </ns1:p>
@@ -16243,7 +16218,7 @@
           <ns1:lstStyle/>
           <ns1:p>
             <ns1:r>
-              <ns1:rPr lang="ko-KR" altLang="en-US" dirty="0" smtClean="0">
+              <ns1:rPr lang="ko-KR" altLang="en-US" sz="1200" dirty="0" smtClean="0">
                 <ns1:solidFill>
                   <ns1:schemeClr val="tx1">
                     <ns1:lumMod val="75000"/>
@@ -17382,7 +17357,7 @@
           <ns1:lstStyle/>
           <ns1:p>
             <ns1:r>
-              <ns1:rPr lang="ko-KR" altLang="en-US" dirty="0">
+              <ns1:rPr lang="ko-KR" altLang="en-US" sz="1200" dirty="0">
                 <ns1:solidFill>
                   <ns1:schemeClr val="tx1">
                     <ns1:lumMod val="75000"/>
@@ -23432,11 +23407,6 @@
           <ns1:lstStyle/>
           <ns1:p>
             <ns1:r>
-              <ns1:rPr dirty="0">
-                <ns1:latin typeface="Pretendard"/>
-                <ns1:ea typeface="Pretendard"/>
-                <ns1:cs typeface="Pretendard"/>
-              </ns1:rPr>
               <ns1:t>03 데이터 파이프라인</ns1:t>
             </ns1:r>
           </ns1:p>
@@ -23529,7 +23499,7 @@
           <ns1:lstStyle/>
           <ns1:p>
             <ns1:r>
-              <ns1:rPr lang="ko-KR" altLang="en-US" dirty="0" smtClean="0">
+              <ns1:rPr lang="ko-KR" altLang="en-US" sz="1200" dirty="0" smtClean="0">
                 <ns1:solidFill>
                   <ns1:schemeClr val="tx1">
                     <ns1:lumMod val="75000"/>
